--- a/PresentationMaterials/introduction-to-jupyter.pptx
+++ b/PresentationMaterials/introduction-to-jupyter.pptx
@@ -20,9 +20,9 @@
     <p:sldId id="268" r:id="rId11"/>
     <p:sldId id="257" r:id="rId12"/>
     <p:sldId id="270" r:id="rId13"/>
-    <p:sldId id="271" r:id="rId14"/>
-    <p:sldId id="272" r:id="rId15"/>
-    <p:sldId id="273" r:id="rId16"/>
+    <p:sldId id="272" r:id="rId14"/>
+    <p:sldId id="273" r:id="rId15"/>
+    <p:sldId id="274" r:id="rId16"/>
   </p:sldIdLst>
   <p:sldSz cx="12192000" cy="6858000"/>
   <p:notesSz cx="6858000" cy="9144000"/>
@@ -121,6 +121,11 @@
       </a:defRPr>
     </a:lvl9pPr>
   </p:defaultTextStyle>
+  <p:extLst>
+    <p:ext uri="{EFAFB233-063F-42B5-8137-9DF3F51BA10A}">
+      <p15:sldGuideLst xmlns:p15="http://schemas.microsoft.com/office/powerpoint/2012/main"/>
+    </p:ext>
+  </p:extLst>
 </p:presentation>
 </file>
 
@@ -206,7 +211,7 @@
           <a:p>
             <a:fld id="{40DDF1E4-614F-4446-BB5E-0163C631C272}" type="datetimeFigureOut">
               <a:rPr lang="en-US" smtClean="0"/>
-              <a:t>10/26/26</a:t>
+              <a:t>10/27/26</a:t>
             </a:fld>
             <a:endParaRPr lang="en-US"/>
           </a:p>
@@ -948,7 +953,7 @@
           <a:p>
             <a:r>
               <a:rPr lang="en-US" dirty="0"/>
-              <a:t>7 minutes. Give learners 3 minutes to skim, then ask in chat. Sort answers into themes on screen as they arrive and do not correct them yet. Flaws the notebook should contain: execution numbers out of order; a variable used before it is defined (hidden state); an absolute file path like C:\Users\...; imports scattered through the notebook; no markdown or explanation; unlabeled plots; no README or package list. If few learners respond, ask for a one-word yes or no first, then reasons, or call on a named person.</a:t>
+              <a:t>Tips 1 to 4 of 8. Map each to a flaw learners just named. Restart &amp; Run All is the one-click reproducibility test. Also mention clearing stale output or re-running before sharing, so saved output matches the code.</a:t>
             </a:r>
           </a:p>
         </p:txBody>
@@ -1059,7 +1064,7 @@
           <a:p>
             <a:r>
               <a:rPr lang="en-US" dirty="0"/>
-              <a:t>Tips 1 to 4 of 8. Map each to a flaw learners just named. Restart &amp; Run All is the one-click reproducibility test. Also mention clearing stale output or re-running before sharing, so saved output matches the code.</a:t>
+              <a:t>Tips 5 to 8 of 8. Tips 7 and 8 set up Exercise 2. About 8 minutes for both tip slides together.</a:t>
             </a:r>
           </a:p>
         </p:txBody>
@@ -1088,117 +1093,6 @@
             <a:fld id="{690FCE24-BE8F-9F4B-A60F-675C348DFC95}" type="slidenum">
               <a:rPr lang="en-US" smtClean="0"/>
               <a:t>14</a:t>
-            </a:fld>
-            <a:endParaRPr lang="en-US"/>
-          </a:p>
-        </p:txBody>
-      </p:sp>
-    </p:spTree>
-    <p:extLst>
-      <p:ext uri="{BB962C8B-B14F-4D97-AF65-F5344CB8AC3E}">
-        <p14:creationId xmlns:p14="http://schemas.microsoft.com/office/powerpoint/2010/main" val="1560910526"/>
-      </p:ext>
-    </p:extLst>
-  </p:cSld>
-  <p:clrMapOvr>
-    <a:masterClrMapping/>
-  </p:clrMapOvr>
-</p:notes>
-</file>
-
-<file path=ppt/notesSlides/notesSlide7.xml><?xml version="1.0" encoding="utf-8"?>
-<p:notes xmlns:a="http://schemas.openxmlformats.org/drawingml/2006/main" xmlns:r="http://schemas.openxmlformats.org/officeDocument/2006/relationships" xmlns:p="http://schemas.openxmlformats.org/presentationml/2006/main">
-  <p:cSld>
-    <p:spTree>
-      <p:nvGrpSpPr>
-        <p:cNvPr id="1" name="">
-          <a:extLst>
-            <a:ext uri="{FF2B5EF4-FFF2-40B4-BE49-F238E27FC236}">
-              <a16:creationId xmlns:a16="http://schemas.microsoft.com/office/drawing/2014/main" id="{448B71D3-F3EA-E040-6966-2B292661434C}"/>
-            </a:ext>
-          </a:extLst>
-        </p:cNvPr>
-        <p:cNvGrpSpPr/>
-        <p:nvPr/>
-      </p:nvGrpSpPr>
-      <p:grpSpPr>
-        <a:xfrm>
-          <a:off x="0" y="0"/>
-          <a:ext cx="0" cy="0"/>
-          <a:chOff x="0" y="0"/>
-          <a:chExt cx="0" cy="0"/>
-        </a:xfrm>
-      </p:grpSpPr>
-      <p:sp>
-        <p:nvSpPr>
-          <p:cNvPr id="2" name="Slide Image Placeholder 1">
-            <a:extLst>
-              <a:ext uri="{FF2B5EF4-FFF2-40B4-BE49-F238E27FC236}">
-                <a16:creationId xmlns:a16="http://schemas.microsoft.com/office/drawing/2014/main" id="{A3736872-9557-7013-9C9B-2931C138BE20}"/>
-              </a:ext>
-            </a:extLst>
-          </p:cNvPr>
-          <p:cNvSpPr>
-            <a:spLocks noGrp="1" noRot="1" noChangeAspect="1"/>
-          </p:cNvSpPr>
-          <p:nvPr>
-            <p:ph type="sldImg"/>
-          </p:nvPr>
-        </p:nvSpPr>
-        <p:spPr/>
-      </p:sp>
-      <p:sp>
-        <p:nvSpPr>
-          <p:cNvPr id="3" name="Notes Placeholder 2">
-            <a:extLst>
-              <a:ext uri="{FF2B5EF4-FFF2-40B4-BE49-F238E27FC236}">
-                <a16:creationId xmlns:a16="http://schemas.microsoft.com/office/drawing/2014/main" id="{7529FFEE-C04F-3265-DE39-EEAF1EF7AD1D}"/>
-              </a:ext>
-            </a:extLst>
-          </p:cNvPr>
-          <p:cNvSpPr>
-            <a:spLocks noGrp="1"/>
-          </p:cNvSpPr>
-          <p:nvPr>
-            <p:ph type="body" idx="1"/>
-          </p:nvPr>
-        </p:nvSpPr>
-        <p:spPr/>
-        <p:txBody>
-          <a:bodyPr/>
-          <a:lstStyle/>
-          <a:p>
-            <a:r>
-              <a:rPr lang="en-US" dirty="0"/>
-              <a:t>Tips 5 to 8 of 8. Tips 7 and 8 set up Exercise 2. About 8 minutes for both tip slides together.</a:t>
-            </a:r>
-          </a:p>
-        </p:txBody>
-      </p:sp>
-      <p:sp>
-        <p:nvSpPr>
-          <p:cNvPr id="4" name="Slide Number Placeholder 3">
-            <a:extLst>
-              <a:ext uri="{FF2B5EF4-FFF2-40B4-BE49-F238E27FC236}">
-                <a16:creationId xmlns:a16="http://schemas.microsoft.com/office/drawing/2014/main" id="{04DD8295-5300-098E-16CB-990C27BB60EE}"/>
-              </a:ext>
-            </a:extLst>
-          </p:cNvPr>
-          <p:cNvSpPr>
-            <a:spLocks noGrp="1"/>
-          </p:cNvSpPr>
-          <p:nvPr>
-            <p:ph type="sldNum" sz="quarter" idx="5"/>
-          </p:nvPr>
-        </p:nvSpPr>
-        <p:spPr/>
-        <p:txBody>
-          <a:bodyPr/>
-          <a:lstStyle/>
-          <a:p>
-            <a:fld id="{690FCE24-BE8F-9F4B-A60F-675C348DFC95}" type="slidenum">
-              <a:rPr lang="en-US" smtClean="0"/>
-              <a:t>15</a:t>
             </a:fld>
             <a:endParaRPr lang="en-US"/>
           </a:p>
@@ -1583,7 +1477,7 @@
           <a:p>
             <a:fld id="{10080E1B-8759-DB40-902A-69B36E2FD8C4}" type="datetimeFigureOut">
               <a:rPr lang="en-US" smtClean="0"/>
-              <a:t>10/26/26</a:t>
+              <a:t>10/27/26</a:t>
             </a:fld>
             <a:endParaRPr lang="en-US"/>
           </a:p>
@@ -1807,7 +1701,7 @@
           <a:p>
             <a:fld id="{10080E1B-8759-DB40-902A-69B36E2FD8C4}" type="datetimeFigureOut">
               <a:rPr lang="en-US" smtClean="0"/>
-              <a:t>10/26/26</a:t>
+              <a:t>10/27/26</a:t>
             </a:fld>
             <a:endParaRPr lang="en-US"/>
           </a:p>
@@ -2355,7 +2249,7 @@
           <a:p>
             <a:fld id="{10080E1B-8759-DB40-902A-69B36E2FD8C4}" type="datetimeFigureOut">
               <a:rPr lang="en-US" smtClean="0"/>
-              <a:t>10/26/26</a:t>
+              <a:t>10/27/26</a:t>
             </a:fld>
             <a:endParaRPr lang="en-US"/>
           </a:p>
@@ -2636,7 +2530,7 @@
           <a:p>
             <a:fld id="{10080E1B-8759-DB40-902A-69B36E2FD8C4}" type="datetimeFigureOut">
               <a:rPr lang="en-US" smtClean="0"/>
-              <a:t>10/26/26</a:t>
+              <a:t>10/27/26</a:t>
             </a:fld>
             <a:endParaRPr lang="en-US"/>
           </a:p>
@@ -3064,7 +2958,7 @@
           <a:p>
             <a:fld id="{10080E1B-8759-DB40-902A-69B36E2FD8C4}" type="datetimeFigureOut">
               <a:rPr lang="en-US" smtClean="0"/>
-              <a:t>10/26/26</a:t>
+              <a:t>10/27/26</a:t>
             </a:fld>
             <a:endParaRPr lang="en-US"/>
           </a:p>
@@ -3221,7 +3115,7 @@
           <a:p>
             <a:fld id="{10080E1B-8759-DB40-902A-69B36E2FD8C4}" type="datetimeFigureOut">
               <a:rPr lang="en-US" smtClean="0"/>
-              <a:t>10/26/26</a:t>
+              <a:t>10/27/26</a:t>
             </a:fld>
             <a:endParaRPr lang="en-US"/>
           </a:p>
@@ -3350,7 +3244,7 @@
           <a:p>
             <a:fld id="{10080E1B-8759-DB40-902A-69B36E2FD8C4}" type="datetimeFigureOut">
               <a:rPr lang="en-US" smtClean="0"/>
-              <a:t>10/26/26</a:t>
+              <a:t>10/27/26</a:t>
             </a:fld>
             <a:endParaRPr lang="en-US"/>
           </a:p>
@@ -3677,7 +3571,7 @@
           <a:p>
             <a:fld id="{10080E1B-8759-DB40-902A-69B36E2FD8C4}" type="datetimeFigureOut">
               <a:rPr lang="en-US" smtClean="0"/>
-              <a:t>10/26/26</a:t>
+              <a:t>10/27/26</a:t>
             </a:fld>
             <a:endParaRPr lang="en-US"/>
           </a:p>
@@ -3981,7 +3875,7 @@
           <a:p>
             <a:fld id="{10080E1B-8759-DB40-902A-69B36E2FD8C4}" type="datetimeFigureOut">
               <a:rPr lang="en-US" smtClean="0"/>
-              <a:t>10/26/26</a:t>
+              <a:t>10/27/26</a:t>
             </a:fld>
             <a:endParaRPr lang="en-US"/>
           </a:p>
@@ -5141,7 +5035,7 @@
         </p:spPr>
         <p:txBody>
           <a:bodyPr>
-            <a:normAutofit fontScale="77500" lnSpcReduction="20000"/>
+            <a:normAutofit fontScale="92500"/>
           </a:bodyPr>
           <a:lstStyle/>
           <a:p>
@@ -5154,7 +5048,7 @@
                   </a:schemeClr>
                 </a:solidFill>
               </a:rPr>
-              <a:t>Interactive notebooks for data analysis and visualization </a:t>
+              <a:t>Jupyter Lab is a multi-notebook editing environment, or Interactive Development Environment (IDE)</a:t>
             </a:r>
           </a:p>
           <a:p>
@@ -5167,10 +5061,12 @@
                   </a:schemeClr>
                 </a:solidFill>
               </a:rPr>
-              <a:t>Can execute code, or display formatted text, using </a:t>
-            </a:r>
-            <a:r>
-              <a:rPr lang="en-US" i="1" dirty="0">
+              <a:t>Runs in a web browser.</a:t>
+            </a:r>
+          </a:p>
+          <a:p>
+            <a:r>
+              <a:rPr lang="en-US" dirty="0">
                 <a:solidFill>
                   <a:schemeClr val="tx1">
                     <a:lumMod val="85000"/>
@@ -5178,55 +5074,7 @@
                   </a:schemeClr>
                 </a:solidFill>
               </a:rPr>
-              <a:t>markdown</a:t>
-            </a:r>
-          </a:p>
-          <a:p>
-            <a:r>
-              <a:rPr lang="en-US" dirty="0">
-                <a:solidFill>
-                  <a:schemeClr val="tx1">
-                    <a:lumMod val="85000"/>
-                    <a:lumOff val="15000"/>
-                  </a:schemeClr>
-                </a:solidFill>
-              </a:rPr>
-              <a:t>Supports multiple programming languages (Python, R, Julia, Fortran and more) through </a:t>
-            </a:r>
-            <a:r>
-              <a:rPr lang="en-US" i="1" dirty="0">
-                <a:solidFill>
-                  <a:schemeClr val="tx1">
-                    <a:lumMod val="85000"/>
-                    <a:lumOff val="15000"/>
-                  </a:schemeClr>
-                </a:solidFill>
-              </a:rPr>
-              <a:t>kernels</a:t>
-            </a:r>
-            <a:r>
-              <a:rPr lang="en-US" dirty="0">
-                <a:solidFill>
-                  <a:schemeClr val="tx1">
-                    <a:lumMod val="85000"/>
-                    <a:lumOff val="15000"/>
-                  </a:schemeClr>
-                </a:solidFill>
-              </a:rPr>
-              <a:t>, software that executes code.</a:t>
-            </a:r>
-          </a:p>
-          <a:p>
-            <a:r>
-              <a:rPr lang="en-US" dirty="0">
-                <a:solidFill>
-                  <a:schemeClr val="tx1">
-                    <a:lumMod val="85000"/>
-                    <a:lumOff val="15000"/>
-                  </a:schemeClr>
-                </a:solidFill>
-              </a:rPr>
-              <a:t>Can be shared directly, or in other formats</a:t>
+              <a:t>Can view, edit, and run multiple notebooks, as well as regular Python scripts. </a:t>
             </a:r>
           </a:p>
           <a:p>
@@ -5254,12 +5102,63 @@
           </a:p>
         </p:txBody>
       </p:sp>
+      <p:sp>
+        <p:nvSpPr>
+          <p:cNvPr id="7" name="Footer Placeholder 6">
+            <a:extLst>
+              <a:ext uri="{FF2B5EF4-FFF2-40B4-BE49-F238E27FC236}">
+                <a16:creationId xmlns:a16="http://schemas.microsoft.com/office/drawing/2014/main" id="{37E9D81D-7C6E-F4CA-65FC-BE8F93DB0079}"/>
+              </a:ext>
+            </a:extLst>
+          </p:cNvPr>
+          <p:cNvSpPr>
+            <a:spLocks noGrp="1"/>
+          </p:cNvSpPr>
+          <p:nvPr>
+            <p:ph type="ftr" sz="quarter" idx="3"/>
+          </p:nvPr>
+        </p:nvSpPr>
+        <p:spPr>
+          <a:xfrm>
+            <a:off x="838200" y="6356350"/>
+            <a:ext cx="10515600" cy="365125"/>
+          </a:xfrm>
+        </p:spPr>
+        <p:txBody>
+          <a:bodyPr/>
+          <a:lstStyle/>
+          <a:p>
+            <a:r>
+              <a:rPr lang="en-US" dirty="0"/>
+              <a:t>Project Jupyter. (n.d.). </a:t>
+            </a:r>
+            <a:r>
+              <a:rPr lang="en-US" dirty="0" err="1"/>
+              <a:t>JupyterLab</a:t>
+            </a:r>
+            <a:r>
+              <a:rPr lang="en-US" dirty="0"/>
+              <a:t> interface screenshot [Image]. Jupyter. </a:t>
+            </a:r>
+            <a:r>
+              <a:rPr lang="en-US" dirty="0">
+                <a:hlinkClick r:id="rId3"/>
+              </a:rPr>
+              <a:t>https://jupyter.org/assets/homepage/jupyterpreview.webp</a:t>
+            </a:r>
+            <a:r>
+              <a:rPr lang="en-US" dirty="0"/>
+              <a:t> </a:t>
+            </a:r>
+          </a:p>
+        </p:txBody>
+      </p:sp>
       <p:pic>
         <p:nvPicPr>
-          <p:cNvPr id="6" name="Picture 5" descr="example notebook of Lorenz differential equations">
-            <a:extLst>
-              <a:ext uri="{FF2B5EF4-FFF2-40B4-BE49-F238E27FC236}">
-                <a16:creationId xmlns:a16="http://schemas.microsoft.com/office/drawing/2014/main" id="{3FA77E4E-4089-FFBD-EDD3-FB4353580FC3}"/>
+          <p:cNvPr id="4" name="Picture 3" descr="examples of jupyterlab workspaces in single document and multiple document workspaces">
+            <a:extLst>
+              <a:ext uri="{FF2B5EF4-FFF2-40B4-BE49-F238E27FC236}">
+                <a16:creationId xmlns:a16="http://schemas.microsoft.com/office/drawing/2014/main" id="{2AFBB83C-A006-9E28-062F-BB71BA782176}"/>
               </a:ext>
             </a:extLst>
           </p:cNvPr>
@@ -5269,15 +5168,15 @@
           <p:nvPr/>
         </p:nvPicPr>
         <p:blipFill>
-          <a:blip r:embed="rId3"/>
+          <a:blip r:embed="rId4"/>
           <a:stretch>
             <a:fillRect/>
           </a:stretch>
         </p:blipFill>
         <p:spPr>
           <a:xfrm>
-            <a:off x="5647967" y="1465220"/>
-            <a:ext cx="6331091" cy="4485417"/>
+            <a:off x="5932076" y="1191580"/>
+            <a:ext cx="6259924" cy="4434997"/>
           </a:xfrm>
           <a:prstGeom prst="rect">
             <a:avLst/>
@@ -5286,248 +5185,36 @@
       </p:pic>
       <p:sp>
         <p:nvSpPr>
-          <p:cNvPr id="7" name="Footer Placeholder 6">
-            <a:extLst>
-              <a:ext uri="{FF2B5EF4-FFF2-40B4-BE49-F238E27FC236}">
-                <a16:creationId xmlns:a16="http://schemas.microsoft.com/office/drawing/2014/main" id="{37E9D81D-7C6E-F4CA-65FC-BE8F93DB0079}"/>
-              </a:ext>
-            </a:extLst>
-          </p:cNvPr>
-          <p:cNvSpPr>
-            <a:spLocks noGrp="1"/>
-          </p:cNvSpPr>
-          <p:nvPr>
-            <p:ph type="ftr" sz="quarter" idx="3"/>
-          </p:nvPr>
-        </p:nvSpPr>
-        <p:spPr>
-          <a:xfrm>
-            <a:off x="838200" y="6356350"/>
-            <a:ext cx="10515600" cy="365125"/>
-          </a:xfrm>
-        </p:spPr>
-        <p:txBody>
-          <a:bodyPr/>
+          <p:cNvPr id="5" name="TextBox 4">
+            <a:extLst>
+              <a:ext uri="{FF2B5EF4-FFF2-40B4-BE49-F238E27FC236}">
+                <a16:creationId xmlns:a16="http://schemas.microsoft.com/office/drawing/2014/main" id="{68FB843D-3213-7D55-CB8C-C1AE2B826D67}"/>
+              </a:ext>
+            </a:extLst>
+          </p:cNvPr>
+          <p:cNvSpPr txBox="1"/>
+          <p:nvPr/>
+        </p:nvSpPr>
+        <p:spPr>
+          <a:xfrm>
+            <a:off x="3839227" y="6632532"/>
+            <a:ext cx="184731" cy="369332"/>
+          </a:xfrm>
+          <a:prstGeom prst="rect">
+            <a:avLst/>
+          </a:prstGeom>
+          <a:noFill/>
+        </p:spPr>
+        <p:txBody>
+          <a:bodyPr wrap="none" rtlCol="0">
+            <a:spAutoFit/>
+          </a:bodyPr>
           <a:lstStyle/>
           <a:p>
-            <a:r>
-              <a:rPr lang="en-US" dirty="0"/>
-              <a:t>Project Jupyter. (n.d.). Jupyter Notebook interface screenshot [Image]. Jupyter. </a:t>
-            </a:r>
-            <a:r>
-              <a:rPr lang="en-US" dirty="0">
-                <a:hlinkClick r:id="rId4"/>
-              </a:rPr>
-              <a:t>https://jupyter.org/assets/homepage/jupyterpreview.webp</a:t>
-            </a:r>
-            <a:r>
-              <a:rPr lang="en-US" dirty="0"/>
-              <a:t> </a:t>
-            </a:r>
-          </a:p>
-        </p:txBody>
-      </p:sp>
-      <p:graphicFrame>
-        <p:nvGraphicFramePr>
-          <p:cNvPr id="8" name="Table 7">
-            <a:extLst>
-              <a:ext uri="{FF2B5EF4-FFF2-40B4-BE49-F238E27FC236}">
-                <a16:creationId xmlns:a16="http://schemas.microsoft.com/office/drawing/2014/main" id="{474384D6-2487-559A-3263-1815309CF4F6}"/>
-              </a:ext>
-            </a:extLst>
-          </p:cNvPr>
-          <p:cNvGraphicFramePr>
-            <a:graphicFrameLocks noGrp="1"/>
-          </p:cNvGraphicFramePr>
-          <p:nvPr/>
-        </p:nvGraphicFramePr>
-        <p:xfrm>
-          <a:off x="1067779" y="5626577"/>
-          <a:ext cx="4239146" cy="914400"/>
-        </p:xfrm>
-        <a:graphic>
-          <a:graphicData uri="http://schemas.openxmlformats.org/drawingml/2006/table">
-            <a:tbl>
-              <a:tblPr firstRow="1" bandRow="1">
-                <a:tableStyleId>{5C22544A-7EE6-4342-B048-85BDC9FD1C3A}</a:tableStyleId>
-              </a:tblPr>
-              <a:tblGrid>
-                <a:gridCol w="2119573">
-                  <a:extLst>
-                    <a:ext uri="{9D8B030D-6E8A-4147-A177-3AD203B41FA5}">
-                      <a16:colId xmlns:a16="http://schemas.microsoft.com/office/drawing/2014/main" val="2326074099"/>
-                    </a:ext>
-                  </a:extLst>
-                </a:gridCol>
-                <a:gridCol w="2119573">
-                  <a:extLst>
-                    <a:ext uri="{9D8B030D-6E8A-4147-A177-3AD203B41FA5}">
-                      <a16:colId xmlns:a16="http://schemas.microsoft.com/office/drawing/2014/main" val="3988260836"/>
-                    </a:ext>
-                  </a:extLst>
-                </a:gridCol>
-              </a:tblGrid>
-              <a:tr h="370840">
-                <a:tc>
-                  <a:txBody>
-                    <a:bodyPr/>
-                    <a:lstStyle/>
-                    <a:p>
-                      <a:pPr marL="285750" indent="-285750">
-                        <a:buFont typeface="Arial" panose="020B0604020202020204" pitchFamily="34" charset="0"/>
-                        <a:buChar char="•"/>
-                      </a:pPr>
-                      <a:r>
-                        <a:rPr lang="en-US" b="0" dirty="0">
-                          <a:solidFill>
-                            <a:schemeClr val="tx1">
-                              <a:lumMod val="85000"/>
-                              <a:lumOff val="15000"/>
-                            </a:schemeClr>
-                          </a:solidFill>
-                          <a:latin typeface="Inter" panose="02000503000000020004" pitchFamily="2" charset="0"/>
-                          <a:ea typeface="Inter" panose="02000503000000020004" pitchFamily="2" charset="0"/>
-                        </a:rPr>
-                        <a:t>Notebook </a:t>
-                      </a:r>
-                    </a:p>
-                    <a:p>
-                      <a:pPr marL="285750" indent="-285750">
-                        <a:buFont typeface="Arial" panose="020B0604020202020204" pitchFamily="34" charset="0"/>
-                        <a:buChar char="•"/>
-                      </a:pPr>
-                      <a:r>
-                        <a:rPr lang="en-US" b="0" dirty="0">
-                          <a:solidFill>
-                            <a:schemeClr val="tx1">
-                              <a:lumMod val="85000"/>
-                              <a:lumOff val="15000"/>
-                            </a:schemeClr>
-                          </a:solidFill>
-                          <a:latin typeface="Inter" panose="02000503000000020004" pitchFamily="2" charset="0"/>
-                          <a:ea typeface="Inter" panose="02000503000000020004" pitchFamily="2" charset="0"/>
-                        </a:rPr>
-                        <a:t>Website</a:t>
-                      </a:r>
-                    </a:p>
-                  </a:txBody>
-                  <a:tcPr>
-                    <a:lnL w="12700" cmpd="sng">
-                      <a:noFill/>
-                    </a:lnL>
-                    <a:lnR w="12700" cmpd="sng">
-                      <a:noFill/>
-                    </a:lnR>
-                    <a:lnT w="12700" cmpd="sng">
-                      <a:noFill/>
-                    </a:lnT>
-                    <a:lnB w="38100" cmpd="sng">
-                      <a:noFill/>
-                    </a:lnB>
-                    <a:lnTlToBr w="12700" cmpd="sng">
-                      <a:noFill/>
-                      <a:prstDash val="solid"/>
-                    </a:lnTlToBr>
-                    <a:lnBlToTr w="12700" cmpd="sng">
-                      <a:noFill/>
-                      <a:prstDash val="solid"/>
-                    </a:lnBlToTr>
-                    <a:noFill/>
-                  </a:tcPr>
-                </a:tc>
-                <a:tc>
-                  <a:txBody>
-                    <a:bodyPr/>
-                    <a:lstStyle/>
-                    <a:p>
-                      <a:pPr marL="285750" indent="-285750">
-                        <a:buFont typeface="Arial" panose="020B0604020202020204" pitchFamily="34" charset="0"/>
-                        <a:buChar char="•"/>
-                      </a:pPr>
-                      <a:r>
-                        <a:rPr lang="en-US" b="0" dirty="0">
-                          <a:solidFill>
-                            <a:schemeClr val="tx1">
-                              <a:lumMod val="85000"/>
-                              <a:lumOff val="15000"/>
-                            </a:schemeClr>
-                          </a:solidFill>
-                          <a:latin typeface="Inter" panose="02000503000000020004" pitchFamily="2" charset="0"/>
-                          <a:ea typeface="Inter" panose="02000503000000020004" pitchFamily="2" charset="0"/>
-                        </a:rPr>
-                        <a:t>Slides</a:t>
-                      </a:r>
-                    </a:p>
-                    <a:p>
-                      <a:pPr marL="285750" indent="-285750">
-                        <a:buFont typeface="Arial" panose="020B0604020202020204" pitchFamily="34" charset="0"/>
-                        <a:buChar char="•"/>
-                      </a:pPr>
-                      <a:r>
-                        <a:rPr lang="en-US" b="0" dirty="0">
-                          <a:solidFill>
-                            <a:schemeClr val="tx1">
-                              <a:lumMod val="85000"/>
-                              <a:lumOff val="15000"/>
-                            </a:schemeClr>
-                          </a:solidFill>
-                          <a:latin typeface="Inter" panose="02000503000000020004" pitchFamily="2" charset="0"/>
-                          <a:ea typeface="Inter" panose="02000503000000020004" pitchFamily="2" charset="0"/>
-                        </a:rPr>
-                        <a:t>PDF Document</a:t>
-                      </a:r>
-                    </a:p>
-                    <a:p>
-                      <a:pPr marL="285750" indent="-285750">
-                        <a:buFont typeface="Arial" panose="020B0604020202020204" pitchFamily="34" charset="0"/>
-                        <a:buChar char="•"/>
-                      </a:pPr>
-                      <a:endParaRPr lang="en-US" b="0" dirty="0">
-                        <a:solidFill>
-                          <a:schemeClr val="tx1">
-                            <a:lumMod val="85000"/>
-                            <a:lumOff val="15000"/>
-                          </a:schemeClr>
-                        </a:solidFill>
-                        <a:latin typeface="Inter" panose="02000503000000020004" pitchFamily="2" charset="0"/>
-                        <a:ea typeface="Inter" panose="02000503000000020004" pitchFamily="2" charset="0"/>
-                      </a:endParaRPr>
-                    </a:p>
-                  </a:txBody>
-                  <a:tcPr>
-                    <a:lnL w="12700" cmpd="sng">
-                      <a:noFill/>
-                    </a:lnL>
-                    <a:lnR w="12700" cmpd="sng">
-                      <a:noFill/>
-                    </a:lnR>
-                    <a:lnT w="12700" cmpd="sng">
-                      <a:noFill/>
-                    </a:lnT>
-                    <a:lnB w="38100" cmpd="sng">
-                      <a:noFill/>
-                    </a:lnB>
-                    <a:lnTlToBr w="12700" cmpd="sng">
-                      <a:noFill/>
-                      <a:prstDash val="solid"/>
-                    </a:lnTlToBr>
-                    <a:lnBlToTr w="12700" cmpd="sng">
-                      <a:noFill/>
-                      <a:prstDash val="solid"/>
-                    </a:lnBlToTr>
-                    <a:noFill/>
-                  </a:tcPr>
-                </a:tc>
-                <a:extLst>
-                  <a:ext uri="{0D108BD9-81ED-4DB2-BD59-A6C34878D82A}">
-                    <a16:rowId xmlns:a16="http://schemas.microsoft.com/office/drawing/2014/main" val="1277320637"/>
-                  </a:ext>
-                </a:extLst>
-              </a:tr>
-            </a:tbl>
-          </a:graphicData>
-        </a:graphic>
-      </p:graphicFrame>
+            <a:endParaRPr lang="en-US" dirty="0"/>
+          </a:p>
+        </p:txBody>
+      </p:sp>
     </p:spTree>
     <p:extLst>
       <p:ext uri="{BB962C8B-B14F-4D97-AF65-F5344CB8AC3E}">
@@ -5811,14 +5498,51 @@
       </p:grpSpPr>
       <p:sp>
         <p:nvSpPr>
-          <p:cNvPr id="2" name="Discussion prompt"/>
+          <p:cNvPr id="2" name="Title 1"/>
+          <p:cNvSpPr>
+            <a:spLocks noGrp="1"/>
+          </p:cNvSpPr>
+          <p:nvPr>
+            <p:ph type="title"/>
+          </p:nvPr>
+        </p:nvSpPr>
+        <p:spPr/>
+        <p:txBody>
+          <a:bodyPr>
+            <a:normAutofit/>
+          </a:bodyPr>
+          <a:lstStyle/>
+          <a:p>
+            <a:r>
+              <a:rPr lang="en-US" sz="4000" dirty="0">
+                <a:latin typeface="Inter Medium"/>
+                <a:ea typeface="Inter Medium"/>
+              </a:rPr>
+              <a:t>Reproducibility tips: </a:t>
+            </a:r>
+            <a:r>
+              <a:rPr lang="en-US" sz="4000" dirty="0">
+                <a:solidFill>
+                  <a:srgbClr val="002D72"/>
+                </a:solidFill>
+                <a:latin typeface="Inter Medium"/>
+                <a:ea typeface="Inter Medium"/>
+              </a:rPr>
+              <a:t>code</a:t>
+            </a:r>
+          </a:p>
+        </p:txBody>
+      </p:sp>
+      <p:sp>
+        <p:nvSpPr>
+          <p:cNvPr id="5" name="Card 1 text"/>
           <p:cNvSpPr txBox="1"/>
           <p:nvPr/>
         </p:nvSpPr>
         <p:spPr>
           <a:xfrm>
-            <a:off x="1864812" y="2300000"/>
-            <a:ext cx="9400000" cy="944880"/>
+            <a:off x="1788200" y="1975625"/>
+            <a:ext cx="3950000" cy="1550000"/>
           </a:xfrm>
           <a:prstGeom prst="rect">
             <a:avLst/>
@@ -5836,54 +5560,51 @@
           <a:p>
             <a:pPr algn="l">
               <a:spcAft>
+                <a:spcPts val="400"/>
+              </a:spcAft>
+              <a:buNone/>
+            </a:pPr>
+            <a:r>
+              <a:rPr lang="en-US" sz="2200" dirty="0">
+                <a:solidFill>
+                  <a:srgbClr val="002D72"/>
+                </a:solidFill>
+                <a:latin typeface="Inter Medium"/>
+                <a:ea typeface="Inter Medium"/>
+              </a:rPr>
+              <a:t>Restart &amp; Run All</a:t>
+            </a:r>
+          </a:p>
+          <a:p>
+            <a:pPr algn="l">
+              <a:spcAft>
                 <a:spcPts val="0"/>
               </a:spcAft>
               <a:buNone/>
             </a:pPr>
             <a:r>
-              <a:rPr lang="en-US" sz="2800" dirty="0">
+              <a:rPr lang="en-US" sz="1800" dirty="0">
                 <a:solidFill>
                   <a:srgbClr val="404040"/>
                 </a:solidFill>
-                <a:latin typeface="Inter Medium"/>
-                <a:ea typeface="Inter Medium"/>
+                <a:latin typeface="Inter"/>
+                <a:ea typeface="Inter"/>
               </a:rPr>
-              <a:t>Is this notebook reproducible? Why or why not?</a:t>
-            </a:r>
-          </a:p>
-        </p:txBody>
-      </p:sp>
-      <p:cxnSp>
-        <p:nvCxnSpPr>
-          <p:cNvPr id="3" name="Accent line"/>
-          <p:cNvCxnSpPr/>
-          <p:nvPr/>
-        </p:nvCxnSpPr>
-        <p:spPr>
-          <a:xfrm>
-            <a:off x="0" y="2559080"/>
-            <a:ext cx="1784959" cy="0"/>
-          </a:xfrm>
-          <a:prstGeom prst="line">
-            <a:avLst/>
-          </a:prstGeom>
-          <a:ln w="57150">
-            <a:solidFill>
-              <a:srgbClr val="002D72"/>
-            </a:solidFill>
-          </a:ln>
-        </p:spPr>
-      </p:cxnSp>
-      <p:sp>
-        <p:nvSpPr>
-          <p:cNvPr id="4" name="Instructions"/>
+              <a:t>Run it top to bottom on a fresh kernel. If it fails, it isn't reproducible.</a:t>
+            </a:r>
+          </a:p>
+        </p:txBody>
+      </p:sp>
+      <p:sp>
+        <p:nvSpPr>
+          <p:cNvPr id="8" name="Card 2 text"/>
           <p:cNvSpPr txBox="1"/>
           <p:nvPr/>
         </p:nvSpPr>
         <p:spPr>
           <a:xfrm>
-            <a:off x="1864812" y="3394880"/>
-            <a:ext cx="9000000" cy="1100000"/>
+            <a:off x="7203800" y="1975625"/>
+            <a:ext cx="3950000" cy="1550000"/>
           </a:xfrm>
           <a:prstGeom prst="rect">
             <a:avLst/>
@@ -5901,19 +5622,161 @@
           <a:p>
             <a:pPr algn="l">
               <a:spcAft>
+                <a:spcPts val="400"/>
+              </a:spcAft>
+              <a:buNone/>
+            </a:pPr>
+            <a:r>
+              <a:rPr lang="en-US" sz="2200" dirty="0">
+                <a:solidFill>
+                  <a:srgbClr val="002D72"/>
+                </a:solidFill>
+                <a:latin typeface="Inter Medium"/>
+                <a:ea typeface="Inter Medium"/>
+              </a:rPr>
+              <a:t>Keep cells in order</a:t>
+            </a:r>
+          </a:p>
+          <a:p>
+            <a:pPr algn="l">
+              <a:spcAft>
                 <a:spcPts val="0"/>
               </a:spcAft>
               <a:buNone/>
             </a:pPr>
             <a:r>
-              <a:rPr lang="en-US" sz="2000" dirty="0">
-                <a:solidFill>
-                  <a:srgbClr val="595959"/>
+              <a:rPr lang="en-US" sz="1800" dirty="0">
+                <a:solidFill>
+                  <a:srgbClr val="404040"/>
                 </a:solidFill>
                 <a:latin typeface="Inter"/>
                 <a:ea typeface="Inter"/>
               </a:rPr>
-              <a:t>Open bad_example.ipynb and skim it for 3 minutes. Share your answer in the chat.</a:t>
+              <a:t>Your analysis should flow from top to bottom. </a:t>
+            </a:r>
+          </a:p>
+        </p:txBody>
+      </p:sp>
+      <p:sp>
+        <p:nvSpPr>
+          <p:cNvPr id="11" name="Card 3 text"/>
+          <p:cNvSpPr txBox="1"/>
+          <p:nvPr/>
+        </p:nvSpPr>
+        <p:spPr>
+          <a:xfrm>
+            <a:off x="1788200" y="4025625"/>
+            <a:ext cx="3950000" cy="1550000"/>
+          </a:xfrm>
+          <a:prstGeom prst="rect">
+            <a:avLst/>
+          </a:prstGeom>
+          <a:noFill/>
+          <a:ln>
+            <a:noFill/>
+          </a:ln>
+        </p:spPr>
+        <p:txBody>
+          <a:bodyPr wrap="square" lIns="91440" tIns="45720" rIns="91440" bIns="45720" anchor="t">
+            <a:noAutofit/>
+          </a:bodyPr>
+          <a:lstStyle/>
+          <a:p>
+            <a:pPr algn="l">
+              <a:spcAft>
+                <a:spcPts val="400"/>
+              </a:spcAft>
+              <a:buNone/>
+            </a:pPr>
+            <a:r>
+              <a:rPr lang="en-US" sz="2200" dirty="0">
+                <a:solidFill>
+                  <a:srgbClr val="002D72"/>
+                </a:solidFill>
+                <a:latin typeface="Inter Medium"/>
+                <a:ea typeface="Inter Medium"/>
+              </a:rPr>
+              <a:t>Use relative paths</a:t>
+            </a:r>
+          </a:p>
+          <a:p>
+            <a:pPr algn="l">
+              <a:spcAft>
+                <a:spcPts val="0"/>
+              </a:spcAft>
+              <a:buNone/>
+            </a:pPr>
+            <a:r>
+              <a:rPr lang="en-US" sz="1800" dirty="0">
+                <a:solidFill>
+                  <a:srgbClr val="404040"/>
+                </a:solidFill>
+                <a:latin typeface="Inter"/>
+                <a:ea typeface="Inter"/>
+              </a:rPr>
+              <a:t>Keep data in a folder next to the notebook, such as data/.</a:t>
+            </a:r>
+          </a:p>
+        </p:txBody>
+      </p:sp>
+      <p:sp>
+        <p:nvSpPr>
+          <p:cNvPr id="14" name="Card 4 text"/>
+          <p:cNvSpPr txBox="1"/>
+          <p:nvPr/>
+        </p:nvSpPr>
+        <p:spPr>
+          <a:xfrm>
+            <a:off x="7203800" y="4025625"/>
+            <a:ext cx="3950000" cy="1550000"/>
+          </a:xfrm>
+          <a:prstGeom prst="rect">
+            <a:avLst/>
+          </a:prstGeom>
+          <a:noFill/>
+          <a:ln>
+            <a:noFill/>
+          </a:ln>
+        </p:spPr>
+        <p:txBody>
+          <a:bodyPr wrap="square" lIns="91440" tIns="45720" rIns="91440" bIns="45720" anchor="t">
+            <a:noAutofit/>
+          </a:bodyPr>
+          <a:lstStyle/>
+          <a:p>
+            <a:pPr algn="l">
+              <a:spcAft>
+                <a:spcPts val="400"/>
+              </a:spcAft>
+              <a:buNone/>
+            </a:pPr>
+            <a:r>
+              <a:rPr lang="en-US" sz="2200" dirty="0">
+                <a:solidFill>
+                  <a:srgbClr val="002D72"/>
+                </a:solidFill>
+                <a:latin typeface="Inter Medium"/>
+                <a:ea typeface="Inter Medium"/>
+              </a:rPr>
+              <a:t>Imports and seeds first</a:t>
+            </a:r>
+          </a:p>
+          <a:p>
+            <a:pPr algn="l">
+              <a:spcAft>
+                <a:spcPts val="0"/>
+              </a:spcAft>
+              <a:buNone/>
+            </a:pPr>
+            <a:r>
+              <a:rPr lang="en-US" sz="1800" dirty="0">
+                <a:solidFill>
+                  <a:srgbClr val="404040"/>
+                </a:solidFill>
+                <a:latin typeface="Inter"/>
+                <a:ea typeface="Inter"/>
+              </a:rPr>
+              <a:t>Put imports and random seeds in the first code cell.</a:t>
             </a:r>
           </a:p>
         </p:txBody>
@@ -5975,14 +5838,14 @@
                 <a:latin typeface="Inter Medium"/>
                 <a:ea typeface="Inter Medium"/>
               </a:rPr>
-              <a:t>code</a:t>
-            </a:r>
-          </a:p>
-        </p:txBody>
-      </p:sp>
-      <p:sp>
-        <p:nvSpPr>
-          <p:cNvPr id="5" name="Card 1 text"/>
+              <a:t>sharing</a:t>
+            </a:r>
+          </a:p>
+        </p:txBody>
+      </p:sp>
+      <p:sp>
+        <p:nvSpPr>
+          <p:cNvPr id="5" name="Card 5 text"/>
           <p:cNvSpPr txBox="1"/>
           <p:nvPr/>
         </p:nvSpPr>
@@ -6019,7 +5882,7 @@
                 <a:latin typeface="Inter Medium"/>
                 <a:ea typeface="Inter Medium"/>
               </a:rPr>
-              <a:t>Restart &amp; Run All</a:t>
+              <a:t>Explain in markdown</a:t>
             </a:r>
           </a:p>
           <a:p>
@@ -6037,14 +5900,14 @@
                 <a:latin typeface="Inter"/>
                 <a:ea typeface="Inter"/>
               </a:rPr>
-              <a:t>Run it top to bottom on a fresh kernel. If it fails, it isn't reproducible.</a:t>
-            </a:r>
-          </a:p>
-        </p:txBody>
-      </p:sp>
-      <p:sp>
-        <p:nvSpPr>
-          <p:cNvPr id="8" name="Card 2 text"/>
+              <a:t>Add a title, a purpose, and a heading before each step.</a:t>
+            </a:r>
+          </a:p>
+        </p:txBody>
+      </p:sp>
+      <p:sp>
+        <p:nvSpPr>
+          <p:cNvPr id="8" name="Card 6 text"/>
           <p:cNvSpPr txBox="1"/>
           <p:nvPr/>
         </p:nvSpPr>
@@ -6081,7 +5944,7 @@
                 <a:latin typeface="Inter Medium"/>
                 <a:ea typeface="Inter Medium"/>
               </a:rPr>
-              <a:t>Keep cells in order</a:t>
+              <a:t>Record your environment</a:t>
             </a:r>
           </a:p>
           <a:p>
@@ -6099,14 +5962,14 @@
                 <a:latin typeface="Inter"/>
                 <a:ea typeface="Inter"/>
               </a:rPr>
-              <a:t>Your analysis should flow from top to bottom. </a:t>
-            </a:r>
-          </a:p>
-        </p:txBody>
-      </p:sp>
-      <p:sp>
-        <p:nvSpPr>
-          <p:cNvPr id="11" name="Card 3 text"/>
+              <a:t>List package versions in environment.yml or requirements.txt.</a:t>
+            </a:r>
+          </a:p>
+        </p:txBody>
+      </p:sp>
+      <p:sp>
+        <p:nvSpPr>
+          <p:cNvPr id="11" name="Card 7 text"/>
           <p:cNvSpPr txBox="1"/>
           <p:nvPr/>
         </p:nvSpPr>
@@ -6143,7 +6006,7 @@
                 <a:latin typeface="Inter Medium"/>
                 <a:ea typeface="Inter Medium"/>
               </a:rPr>
-              <a:t>Use relative paths</a:t>
+              <a:t>Separate the stages</a:t>
             </a:r>
           </a:p>
           <a:p>
@@ -6154,21 +6017,36 @@
               <a:buNone/>
             </a:pPr>
             <a:r>
-              <a:rPr lang="en-US" sz="1800" dirty="0">
+              <a:rPr lang="en-US" dirty="0">
                 <a:solidFill>
                   <a:srgbClr val="404040"/>
                 </a:solidFill>
                 <a:latin typeface="Inter"/>
                 <a:ea typeface="Inter"/>
               </a:rPr>
-              <a:t>Keep data in a folder next to the notebook, such as data/.</a:t>
-            </a:r>
-          </a:p>
-        </p:txBody>
-      </p:sp>
-      <p:sp>
-        <p:nvSpPr>
-          <p:cNvPr id="14" name="Card 4 text"/>
+              <a:t>Separate the major steps of your analysis, such as cleaning, analysis, and visualization</a:t>
+            </a:r>
+          </a:p>
+          <a:p>
+            <a:pPr algn="l">
+              <a:spcAft>
+                <a:spcPts val="0"/>
+              </a:spcAft>
+              <a:buNone/>
+            </a:pPr>
+            <a:endParaRPr lang="en-US" sz="1800" dirty="0">
+              <a:solidFill>
+                <a:srgbClr val="404040"/>
+              </a:solidFill>
+              <a:latin typeface="Inter"/>
+              <a:ea typeface="Inter"/>
+            </a:endParaRPr>
+          </a:p>
+        </p:txBody>
+      </p:sp>
+      <p:sp>
+        <p:nvSpPr>
+          <p:cNvPr id="14" name="Card 8 text"/>
           <p:cNvSpPr txBox="1"/>
           <p:nvPr/>
         </p:nvSpPr>
@@ -6205,7 +6083,7 @@
                 <a:latin typeface="Inter Medium"/>
                 <a:ea typeface="Inter Medium"/>
               </a:rPr>
-              <a:t>Imports and seeds first</a:t>
+              <a:t>Add a README</a:t>
             </a:r>
           </a:p>
           <a:p>
@@ -6223,7 +6101,7 @@
                 <a:latin typeface="Inter"/>
                 <a:ea typeface="Inter"/>
               </a:rPr>
-              <a:t>Put imports and random seeds in the first code cell.</a:t>
+              <a:t>Say what the project is, how to run it, and what each file does.</a:t>
             </a:r>
           </a:p>
         </p:txBody>
@@ -6241,7 +6119,13 @@
   <p:cSld>
     <p:spTree>
       <p:nvGrpSpPr>
-        <p:cNvPr id="1" name=""/>
+        <p:cNvPr id="1" name="">
+          <a:extLst>
+            <a:ext uri="{FF2B5EF4-FFF2-40B4-BE49-F238E27FC236}">
+              <a16:creationId xmlns:a16="http://schemas.microsoft.com/office/drawing/2014/main" id="{7594E0C0-BCCA-0C4C-ADA3-03D702DA32D8}"/>
+            </a:ext>
+          </a:extLst>
+        </p:cNvPr>
         <p:cNvGrpSpPr/>
         <p:nvPr/>
       </p:nvGrpSpPr>
@@ -6255,305 +6139,1293 @@
       </p:grpSpPr>
       <p:sp>
         <p:nvSpPr>
-          <p:cNvPr id="2" name="Title 1"/>
-          <p:cNvSpPr>
-            <a:spLocks noGrp="1"/>
-          </p:cNvSpPr>
-          <p:nvPr>
-            <p:ph type="title"/>
-          </p:nvPr>
-        </p:nvSpPr>
-        <p:spPr/>
-        <p:txBody>
-          <a:bodyPr>
-            <a:normAutofit/>
+          <p:cNvPr id="12" name="Pentagon 11">
+            <a:extLst>
+              <a:ext uri="{FF2B5EF4-FFF2-40B4-BE49-F238E27FC236}">
+                <a16:creationId xmlns:a16="http://schemas.microsoft.com/office/drawing/2014/main" id="{2EA031A7-DBF1-AA0E-38FC-30EB4A98136D}"/>
+              </a:ext>
+            </a:extLst>
+          </p:cNvPr>
+          <p:cNvSpPr/>
+          <p:nvPr/>
+        </p:nvSpPr>
+        <p:spPr>
+          <a:xfrm>
+            <a:off x="0" y="5730948"/>
+            <a:ext cx="2317898" cy="1127051"/>
+          </a:xfrm>
+          <a:prstGeom prst="homePlate">
+            <a:avLst/>
+          </a:prstGeom>
+          <a:solidFill>
+            <a:srgbClr val="D4D654"/>
+          </a:solidFill>
+          <a:ln>
+            <a:noFill/>
+          </a:ln>
+        </p:spPr>
+        <p:style>
+          <a:lnRef idx="2">
+            <a:schemeClr val="accent1">
+              <a:shade val="50000"/>
+            </a:schemeClr>
+          </a:lnRef>
+          <a:fillRef idx="1">
+            <a:schemeClr val="accent1"/>
+          </a:fillRef>
+          <a:effectRef idx="0">
+            <a:schemeClr val="accent1"/>
+          </a:effectRef>
+          <a:fontRef idx="minor">
+            <a:schemeClr val="lt1"/>
+          </a:fontRef>
+        </p:style>
+        <p:txBody>
+          <a:bodyPr rtlCol="0" anchor="ctr"/>
+          <a:lstStyle/>
+          <a:p>
+            <a:pPr algn="ctr"/>
+            <a:endParaRPr lang="en-US" sz="2800">
+              <a:latin typeface="Gentona SemiBold Italic" panose="00000700000000000000" pitchFamily="50" charset="0"/>
+            </a:endParaRPr>
+          </a:p>
+        </p:txBody>
+      </p:sp>
+      <p:sp>
+        <p:nvSpPr>
+          <p:cNvPr id="2" name="Rectangle 1">
+            <a:extLst>
+              <a:ext uri="{FF2B5EF4-FFF2-40B4-BE49-F238E27FC236}">
+                <a16:creationId xmlns:a16="http://schemas.microsoft.com/office/drawing/2014/main" id="{D20715E4-5569-DE3D-CD72-32A9E7AD9948}"/>
+              </a:ext>
+            </a:extLst>
+          </p:cNvPr>
+          <p:cNvSpPr/>
+          <p:nvPr/>
+        </p:nvSpPr>
+        <p:spPr>
+          <a:xfrm>
+            <a:off x="-1" y="0"/>
+            <a:ext cx="5284382" cy="5730948"/>
+          </a:xfrm>
+          <a:prstGeom prst="rect">
+            <a:avLst/>
+          </a:prstGeom>
+          <a:solidFill>
+            <a:srgbClr val="24356F"/>
+          </a:solidFill>
+          <a:ln>
+            <a:noFill/>
+          </a:ln>
+        </p:spPr>
+        <p:style>
+          <a:lnRef idx="2">
+            <a:schemeClr val="accent1">
+              <a:shade val="50000"/>
+            </a:schemeClr>
+          </a:lnRef>
+          <a:fillRef idx="1">
+            <a:schemeClr val="accent1"/>
+          </a:fillRef>
+          <a:effectRef idx="0">
+            <a:schemeClr val="accent1"/>
+          </a:effectRef>
+          <a:fontRef idx="minor">
+            <a:schemeClr val="lt1"/>
+          </a:fontRef>
+        </p:style>
+        <p:txBody>
+          <a:bodyPr rtlCol="0" anchor="ctr"/>
+          <a:lstStyle/>
+          <a:p>
+            <a:pPr algn="ctr"/>
+            <a:endParaRPr lang="en-US"/>
+          </a:p>
+        </p:txBody>
+      </p:sp>
+      <p:cxnSp>
+        <p:nvCxnSpPr>
+          <p:cNvPr id="4" name="Straight Connector 3">
+            <a:extLst>
+              <a:ext uri="{FF2B5EF4-FFF2-40B4-BE49-F238E27FC236}">
+                <a16:creationId xmlns:a16="http://schemas.microsoft.com/office/drawing/2014/main" id="{BDD0DB68-3E78-16BF-015B-77187F09DCE9}"/>
+              </a:ext>
+            </a:extLst>
+          </p:cNvPr>
+          <p:cNvCxnSpPr/>
+          <p:nvPr/>
+        </p:nvCxnSpPr>
+        <p:spPr>
+          <a:xfrm>
+            <a:off x="-1" y="5730949"/>
+            <a:ext cx="12192000" cy="0"/>
+          </a:xfrm>
+          <a:prstGeom prst="line">
+            <a:avLst/>
+          </a:prstGeom>
+          <a:ln w="57150">
+            <a:solidFill>
+              <a:srgbClr val="71AA50"/>
+            </a:solidFill>
+          </a:ln>
+        </p:spPr>
+        <p:style>
+          <a:lnRef idx="1">
+            <a:schemeClr val="accent1"/>
+          </a:lnRef>
+          <a:fillRef idx="0">
+            <a:schemeClr val="accent1"/>
+          </a:fillRef>
+          <a:effectRef idx="0">
+            <a:schemeClr val="accent1"/>
+          </a:effectRef>
+          <a:fontRef idx="minor">
+            <a:schemeClr val="tx1"/>
+          </a:fontRef>
+        </p:style>
+      </p:cxnSp>
+      <p:sp>
+        <p:nvSpPr>
+          <p:cNvPr id="5" name="Pentagon 4">
+            <a:extLst>
+              <a:ext uri="{FF2B5EF4-FFF2-40B4-BE49-F238E27FC236}">
+                <a16:creationId xmlns:a16="http://schemas.microsoft.com/office/drawing/2014/main" id="{2E868F17-1725-4B3B-43A6-870433C5987F}"/>
+              </a:ext>
+            </a:extLst>
+          </p:cNvPr>
+          <p:cNvSpPr/>
+          <p:nvPr/>
+        </p:nvSpPr>
+        <p:spPr>
+          <a:xfrm>
+            <a:off x="0" y="5730949"/>
+            <a:ext cx="2115880" cy="1127051"/>
+          </a:xfrm>
+          <a:prstGeom prst="homePlate">
+            <a:avLst/>
+          </a:prstGeom>
+          <a:solidFill>
+            <a:srgbClr val="71AA50"/>
+          </a:solidFill>
+          <a:ln>
+            <a:noFill/>
+          </a:ln>
+        </p:spPr>
+        <p:style>
+          <a:lnRef idx="2">
+            <a:schemeClr val="accent1">
+              <a:shade val="50000"/>
+            </a:schemeClr>
+          </a:lnRef>
+          <a:fillRef idx="1">
+            <a:schemeClr val="accent1"/>
+          </a:fillRef>
+          <a:effectRef idx="0">
+            <a:schemeClr val="accent1"/>
+          </a:effectRef>
+          <a:fontRef idx="minor">
+            <a:schemeClr val="lt1"/>
+          </a:fontRef>
+        </p:style>
+        <p:txBody>
+          <a:bodyPr rtlCol="0" anchor="ctr"/>
+          <a:lstStyle/>
+          <a:p>
+            <a:pPr algn="ctr"/>
+            <a:r>
+              <a:rPr lang="en-US" sz="2400">
+                <a:latin typeface="Quadon" panose="00000800000000000000" pitchFamily="50" charset="0"/>
+              </a:rPr>
+              <a:t>SURVEY</a:t>
+            </a:r>
+          </a:p>
+        </p:txBody>
+      </p:sp>
+      <p:sp>
+        <p:nvSpPr>
+          <p:cNvPr id="6" name="Rectangle 5">
+            <a:extLst>
+              <a:ext uri="{FF2B5EF4-FFF2-40B4-BE49-F238E27FC236}">
+                <a16:creationId xmlns:a16="http://schemas.microsoft.com/office/drawing/2014/main" id="{B708B3E8-636B-7380-0695-D4A9B9674B41}"/>
+              </a:ext>
+            </a:extLst>
+          </p:cNvPr>
+          <p:cNvSpPr/>
+          <p:nvPr/>
+        </p:nvSpPr>
+        <p:spPr>
+          <a:xfrm>
+            <a:off x="2317898" y="6094417"/>
+            <a:ext cx="1901483" cy="369332"/>
+          </a:xfrm>
+          <a:prstGeom prst="rect">
+            <a:avLst/>
+          </a:prstGeom>
+        </p:spPr>
+        <p:txBody>
+          <a:bodyPr wrap="none">
+            <a:spAutoFit/>
           </a:bodyPr>
           <a:lstStyle/>
           <a:p>
             <a:r>
-              <a:rPr lang="en-US" sz="4000" dirty="0">
-                <a:latin typeface="Inter Medium"/>
-                <a:ea typeface="Inter Medium"/>
+              <a:rPr lang="en-US" dirty="0" err="1">
+                <a:solidFill>
+                  <a:srgbClr val="24356F"/>
+                </a:solidFill>
+                <a:latin typeface="Quadon" panose="00000800000000000000" pitchFamily="50" charset="0"/>
               </a:rPr>
-              <a:t>Reproducibility tips: </a:t>
-            </a:r>
-            <a:r>
-              <a:rPr lang="en-US" sz="4000" dirty="0">
-                <a:solidFill>
-                  <a:srgbClr val="002D72"/>
-                </a:solidFill>
-                <a:latin typeface="Inter Medium"/>
-                <a:ea typeface="Inter Medium"/>
+              <a:t>bit.ly</a:t>
+            </a:r>
+            <a:r>
+              <a:rPr lang="en-US" dirty="0">
+                <a:solidFill>
+                  <a:srgbClr val="24356F"/>
+                </a:solidFill>
+                <a:latin typeface="Quadon" panose="00000800000000000000" pitchFamily="50" charset="0"/>
               </a:rPr>
-              <a:t>sharing</a:t>
-            </a:r>
-          </a:p>
-        </p:txBody>
-      </p:sp>
-      <p:sp>
-        <p:nvSpPr>
-          <p:cNvPr id="5" name="Card 5 text"/>
+              <a:t>/</a:t>
+            </a:r>
+            <a:r>
+              <a:rPr lang="en-US" dirty="0" err="1">
+                <a:solidFill>
+                  <a:srgbClr val="24356F"/>
+                </a:solidFill>
+                <a:latin typeface="Quadon" panose="00000800000000000000" pitchFamily="50" charset="0"/>
+              </a:rPr>
+              <a:t>dsds</a:t>
+            </a:r>
+            <a:r>
+              <a:rPr lang="en-US" dirty="0">
+                <a:solidFill>
+                  <a:srgbClr val="24356F"/>
+                </a:solidFill>
+                <a:latin typeface="Quadon" panose="00000800000000000000" pitchFamily="50" charset="0"/>
+              </a:rPr>
+              <a:t>-survey </a:t>
+            </a:r>
+          </a:p>
+        </p:txBody>
+      </p:sp>
+      <p:sp>
+        <p:nvSpPr>
+          <p:cNvPr id="8" name="Right Arrow 7">
+            <a:extLst>
+              <a:ext uri="{FF2B5EF4-FFF2-40B4-BE49-F238E27FC236}">
+                <a16:creationId xmlns:a16="http://schemas.microsoft.com/office/drawing/2014/main" id="{2AA80DBD-3F09-2675-0269-D59FDAAFE7E5}"/>
+              </a:ext>
+            </a:extLst>
+          </p:cNvPr>
+          <p:cNvSpPr/>
+          <p:nvPr/>
+        </p:nvSpPr>
+        <p:spPr>
+          <a:xfrm>
+            <a:off x="0" y="0"/>
+            <a:ext cx="6368902" cy="2638031"/>
+          </a:xfrm>
+          <a:prstGeom prst="rightArrow">
+            <a:avLst>
+              <a:gd name="adj1" fmla="val 52418"/>
+              <a:gd name="adj2" fmla="val 41577"/>
+            </a:avLst>
+          </a:prstGeom>
+          <a:solidFill>
+            <a:srgbClr val="F36E21"/>
+          </a:solidFill>
+          <a:ln>
+            <a:noFill/>
+          </a:ln>
+        </p:spPr>
+        <p:style>
+          <a:lnRef idx="2">
+            <a:schemeClr val="accent1">
+              <a:shade val="50000"/>
+            </a:schemeClr>
+          </a:lnRef>
+          <a:fillRef idx="1">
+            <a:schemeClr val="accent1"/>
+          </a:fillRef>
+          <a:effectRef idx="0">
+            <a:schemeClr val="accent1"/>
+          </a:effectRef>
+          <a:fontRef idx="minor">
+            <a:schemeClr val="lt1"/>
+          </a:fontRef>
+        </p:style>
+        <p:txBody>
+          <a:bodyPr rtlCol="0" anchor="ctr"/>
+          <a:lstStyle/>
+          <a:p>
+            <a:pPr algn="ctr"/>
+            <a:endParaRPr lang="en-US"/>
+          </a:p>
+        </p:txBody>
+      </p:sp>
+      <p:sp>
+        <p:nvSpPr>
+          <p:cNvPr id="9" name="Text Placeholder 4">
+            <a:extLst>
+              <a:ext uri="{FF2B5EF4-FFF2-40B4-BE49-F238E27FC236}">
+                <a16:creationId xmlns:a16="http://schemas.microsoft.com/office/drawing/2014/main" id="{54B70F80-65F0-D619-2066-32E28BAE7063}"/>
+              </a:ext>
+            </a:extLst>
+          </p:cNvPr>
+          <p:cNvSpPr txBox="1">
+            <a:spLocks/>
+          </p:cNvSpPr>
+          <p:nvPr/>
+        </p:nvSpPr>
+        <p:spPr>
+          <a:xfrm>
+            <a:off x="175688" y="805459"/>
+            <a:ext cx="5417038" cy="1027112"/>
+          </a:xfrm>
+          <a:prstGeom prst="rect">
+            <a:avLst/>
+          </a:prstGeom>
+        </p:spPr>
+        <p:txBody>
+          <a:bodyPr anchor="ctr"/>
+          <a:lstStyle>
+            <a:lvl1pPr marL="0" indent="0" algn="l" defTabSz="914400" rtl="0" eaLnBrk="1" latinLnBrk="0" hangingPunct="1">
+              <a:lnSpc>
+                <a:spcPct val="90000"/>
+              </a:lnSpc>
+              <a:spcBef>
+                <a:spcPts val="0"/>
+              </a:spcBef>
+              <a:buFont typeface="Arial" panose="020B0604020202020204" pitchFamily="34" charset="0"/>
+              <a:buNone/>
+              <a:defRPr sz="4000" b="1" i="0" kern="1200">
+                <a:solidFill>
+                  <a:schemeClr val="bg1"/>
+                </a:solidFill>
+                <a:latin typeface="Gentona SemiBold" pitchFamily="2" charset="77"/>
+                <a:ea typeface="+mn-ea"/>
+                <a:cs typeface="+mn-cs"/>
+              </a:defRPr>
+            </a:lvl1pPr>
+            <a:lvl2pPr marL="685800" indent="-228600" algn="l" defTabSz="914400" rtl="0" eaLnBrk="1" latinLnBrk="0" hangingPunct="1">
+              <a:lnSpc>
+                <a:spcPct val="90000"/>
+              </a:lnSpc>
+              <a:spcBef>
+                <a:spcPts val="500"/>
+              </a:spcBef>
+              <a:buFont typeface="Arial" panose="020B0604020202020204" pitchFamily="34" charset="0"/>
+              <a:buChar char="•"/>
+              <a:defRPr sz="2400" kern="1200">
+                <a:solidFill>
+                  <a:schemeClr val="tx1"/>
+                </a:solidFill>
+                <a:latin typeface="+mn-lt"/>
+                <a:ea typeface="+mn-ea"/>
+                <a:cs typeface="+mn-cs"/>
+              </a:defRPr>
+            </a:lvl2pPr>
+            <a:lvl3pPr marL="1143000" indent="-228600" algn="l" defTabSz="914400" rtl="0" eaLnBrk="1" latinLnBrk="0" hangingPunct="1">
+              <a:lnSpc>
+                <a:spcPct val="90000"/>
+              </a:lnSpc>
+              <a:spcBef>
+                <a:spcPts val="500"/>
+              </a:spcBef>
+              <a:buFont typeface="Arial" panose="020B0604020202020204" pitchFamily="34" charset="0"/>
+              <a:buChar char="•"/>
+              <a:defRPr sz="2000" kern="1200">
+                <a:solidFill>
+                  <a:schemeClr val="tx1"/>
+                </a:solidFill>
+                <a:latin typeface="+mn-lt"/>
+                <a:ea typeface="+mn-ea"/>
+                <a:cs typeface="+mn-cs"/>
+              </a:defRPr>
+            </a:lvl3pPr>
+            <a:lvl4pPr marL="1600200" indent="-228600" algn="l" defTabSz="914400" rtl="0" eaLnBrk="1" latinLnBrk="0" hangingPunct="1">
+              <a:lnSpc>
+                <a:spcPct val="90000"/>
+              </a:lnSpc>
+              <a:spcBef>
+                <a:spcPts val="500"/>
+              </a:spcBef>
+              <a:buFont typeface="Arial" panose="020B0604020202020204" pitchFamily="34" charset="0"/>
+              <a:buChar char="•"/>
+              <a:defRPr sz="1800" kern="1200">
+                <a:solidFill>
+                  <a:schemeClr val="tx1"/>
+                </a:solidFill>
+                <a:latin typeface="+mn-lt"/>
+                <a:ea typeface="+mn-ea"/>
+                <a:cs typeface="+mn-cs"/>
+              </a:defRPr>
+            </a:lvl4pPr>
+            <a:lvl5pPr marL="2057400" indent="-228600" algn="l" defTabSz="914400" rtl="0" eaLnBrk="1" latinLnBrk="0" hangingPunct="1">
+              <a:lnSpc>
+                <a:spcPct val="90000"/>
+              </a:lnSpc>
+              <a:spcBef>
+                <a:spcPts val="500"/>
+              </a:spcBef>
+              <a:buFont typeface="Arial" panose="020B0604020202020204" pitchFamily="34" charset="0"/>
+              <a:buChar char="•"/>
+              <a:defRPr sz="1800" kern="1200">
+                <a:solidFill>
+                  <a:schemeClr val="tx1"/>
+                </a:solidFill>
+                <a:latin typeface="+mn-lt"/>
+                <a:ea typeface="+mn-ea"/>
+                <a:cs typeface="+mn-cs"/>
+              </a:defRPr>
+            </a:lvl5pPr>
+            <a:lvl6pPr marL="2514600" indent="-228600" algn="l" defTabSz="914400" rtl="0" eaLnBrk="1" latinLnBrk="0" hangingPunct="1">
+              <a:lnSpc>
+                <a:spcPct val="90000"/>
+              </a:lnSpc>
+              <a:spcBef>
+                <a:spcPts val="500"/>
+              </a:spcBef>
+              <a:buFont typeface="Arial" panose="020B0604020202020204" pitchFamily="34" charset="0"/>
+              <a:buChar char="•"/>
+              <a:defRPr sz="1800" kern="1200">
+                <a:solidFill>
+                  <a:schemeClr val="tx1"/>
+                </a:solidFill>
+                <a:latin typeface="+mn-lt"/>
+                <a:ea typeface="+mn-ea"/>
+                <a:cs typeface="+mn-cs"/>
+              </a:defRPr>
+            </a:lvl6pPr>
+            <a:lvl7pPr marL="2971800" indent="-228600" algn="l" defTabSz="914400" rtl="0" eaLnBrk="1" latinLnBrk="0" hangingPunct="1">
+              <a:lnSpc>
+                <a:spcPct val="90000"/>
+              </a:lnSpc>
+              <a:spcBef>
+                <a:spcPts val="500"/>
+              </a:spcBef>
+              <a:buFont typeface="Arial" panose="020B0604020202020204" pitchFamily="34" charset="0"/>
+              <a:buChar char="•"/>
+              <a:defRPr sz="1800" kern="1200">
+                <a:solidFill>
+                  <a:schemeClr val="tx1"/>
+                </a:solidFill>
+                <a:latin typeface="+mn-lt"/>
+                <a:ea typeface="+mn-ea"/>
+                <a:cs typeface="+mn-cs"/>
+              </a:defRPr>
+            </a:lvl7pPr>
+            <a:lvl8pPr marL="3429000" indent="-228600" algn="l" defTabSz="914400" rtl="0" eaLnBrk="1" latinLnBrk="0" hangingPunct="1">
+              <a:lnSpc>
+                <a:spcPct val="90000"/>
+              </a:lnSpc>
+              <a:spcBef>
+                <a:spcPts val="500"/>
+              </a:spcBef>
+              <a:buFont typeface="Arial" panose="020B0604020202020204" pitchFamily="34" charset="0"/>
+              <a:buChar char="•"/>
+              <a:defRPr sz="1800" kern="1200">
+                <a:solidFill>
+                  <a:schemeClr val="tx1"/>
+                </a:solidFill>
+                <a:latin typeface="+mn-lt"/>
+                <a:ea typeface="+mn-ea"/>
+                <a:cs typeface="+mn-cs"/>
+              </a:defRPr>
+            </a:lvl8pPr>
+            <a:lvl9pPr marL="3886200" indent="-228600" algn="l" defTabSz="914400" rtl="0" eaLnBrk="1" latinLnBrk="0" hangingPunct="1">
+              <a:lnSpc>
+                <a:spcPct val="90000"/>
+              </a:lnSpc>
+              <a:spcBef>
+                <a:spcPts val="500"/>
+              </a:spcBef>
+              <a:buFont typeface="Arial" panose="020B0604020202020204" pitchFamily="34" charset="0"/>
+              <a:buChar char="•"/>
+              <a:defRPr sz="1800" kern="1200">
+                <a:solidFill>
+                  <a:schemeClr val="tx1"/>
+                </a:solidFill>
+                <a:latin typeface="+mn-lt"/>
+                <a:ea typeface="+mn-ea"/>
+                <a:cs typeface="+mn-cs"/>
+              </a:defRPr>
+            </a:lvl9pPr>
+          </a:lstStyle>
+          <a:p>
+            <a:r>
+              <a:rPr lang="en-US" sz="3200"/>
+              <a:t>Contact JHU Data Services</a:t>
+            </a:r>
+          </a:p>
+        </p:txBody>
+      </p:sp>
+      <p:sp>
+        <p:nvSpPr>
+          <p:cNvPr id="10" name="Text Placeholder 17">
+            <a:extLst>
+              <a:ext uri="{FF2B5EF4-FFF2-40B4-BE49-F238E27FC236}">
+                <a16:creationId xmlns:a16="http://schemas.microsoft.com/office/drawing/2014/main" id="{F156567D-03D9-B9F2-9DB9-FF77C42486DA}"/>
+              </a:ext>
+            </a:extLst>
+          </p:cNvPr>
+          <p:cNvSpPr txBox="1">
+            <a:spLocks/>
+          </p:cNvSpPr>
+          <p:nvPr/>
+        </p:nvSpPr>
+        <p:spPr>
+          <a:xfrm>
+            <a:off x="167587" y="2422962"/>
+            <a:ext cx="5284382" cy="2753980"/>
+          </a:xfrm>
+          <a:prstGeom prst="rect">
+            <a:avLst/>
+          </a:prstGeom>
+        </p:spPr>
+        <p:txBody>
+          <a:bodyPr anchor="b"/>
+          <a:lstStyle>
+            <a:lvl1pPr marL="0" indent="0" algn="l" defTabSz="914400" rtl="0" eaLnBrk="1" latinLnBrk="0" hangingPunct="1">
+              <a:lnSpc>
+                <a:spcPct val="90000"/>
+              </a:lnSpc>
+              <a:spcBef>
+                <a:spcPts val="500"/>
+              </a:spcBef>
+              <a:buFont typeface="Arial" panose="020B0604020202020204" pitchFamily="34" charset="0"/>
+              <a:buNone/>
+              <a:defRPr sz="2200" b="1" kern="1200">
+                <a:solidFill>
+                  <a:srgbClr val="252F5A"/>
+                </a:solidFill>
+                <a:latin typeface="Gentona Book" pitchFamily="2" charset="77"/>
+                <a:ea typeface="+mn-ea"/>
+                <a:cs typeface="+mn-cs"/>
+              </a:defRPr>
+            </a:lvl1pPr>
+            <a:lvl2pPr marL="685800" indent="-228600" algn="l" defTabSz="914400" rtl="0" eaLnBrk="1" latinLnBrk="0" hangingPunct="1">
+              <a:lnSpc>
+                <a:spcPct val="90000"/>
+              </a:lnSpc>
+              <a:spcBef>
+                <a:spcPts val="500"/>
+              </a:spcBef>
+              <a:buFont typeface="Arial" panose="020B0604020202020204" pitchFamily="34" charset="0"/>
+              <a:buChar char="•"/>
+              <a:defRPr sz="2400" kern="1200">
+                <a:solidFill>
+                  <a:schemeClr val="tx1"/>
+                </a:solidFill>
+                <a:latin typeface="+mn-lt"/>
+                <a:ea typeface="+mn-ea"/>
+                <a:cs typeface="+mn-cs"/>
+              </a:defRPr>
+            </a:lvl2pPr>
+            <a:lvl3pPr marL="1143000" indent="-228600" algn="l" defTabSz="914400" rtl="0" eaLnBrk="1" latinLnBrk="0" hangingPunct="1">
+              <a:lnSpc>
+                <a:spcPct val="90000"/>
+              </a:lnSpc>
+              <a:spcBef>
+                <a:spcPts val="500"/>
+              </a:spcBef>
+              <a:buFont typeface="Arial" panose="020B0604020202020204" pitchFamily="34" charset="0"/>
+              <a:buChar char="•"/>
+              <a:defRPr sz="2000" kern="1200">
+                <a:solidFill>
+                  <a:schemeClr val="tx1"/>
+                </a:solidFill>
+                <a:latin typeface="+mn-lt"/>
+                <a:ea typeface="+mn-ea"/>
+                <a:cs typeface="+mn-cs"/>
+              </a:defRPr>
+            </a:lvl3pPr>
+            <a:lvl4pPr marL="1600200" indent="-228600" algn="l" defTabSz="914400" rtl="0" eaLnBrk="1" latinLnBrk="0" hangingPunct="1">
+              <a:lnSpc>
+                <a:spcPct val="90000"/>
+              </a:lnSpc>
+              <a:spcBef>
+                <a:spcPts val="500"/>
+              </a:spcBef>
+              <a:buFont typeface="Arial" panose="020B0604020202020204" pitchFamily="34" charset="0"/>
+              <a:buChar char="•"/>
+              <a:defRPr sz="1800" kern="1200">
+                <a:solidFill>
+                  <a:schemeClr val="tx1"/>
+                </a:solidFill>
+                <a:latin typeface="+mn-lt"/>
+                <a:ea typeface="+mn-ea"/>
+                <a:cs typeface="+mn-cs"/>
+              </a:defRPr>
+            </a:lvl4pPr>
+            <a:lvl5pPr marL="2057400" indent="-228600" algn="l" defTabSz="914400" rtl="0" eaLnBrk="1" latinLnBrk="0" hangingPunct="1">
+              <a:lnSpc>
+                <a:spcPct val="90000"/>
+              </a:lnSpc>
+              <a:spcBef>
+                <a:spcPts val="500"/>
+              </a:spcBef>
+              <a:buFont typeface="Arial" panose="020B0604020202020204" pitchFamily="34" charset="0"/>
+              <a:buChar char="•"/>
+              <a:defRPr sz="1800" kern="1200">
+                <a:solidFill>
+                  <a:schemeClr val="tx1"/>
+                </a:solidFill>
+                <a:latin typeface="+mn-lt"/>
+                <a:ea typeface="+mn-ea"/>
+                <a:cs typeface="+mn-cs"/>
+              </a:defRPr>
+            </a:lvl5pPr>
+            <a:lvl6pPr marL="2514600" indent="-228600" algn="l" defTabSz="914400" rtl="0" eaLnBrk="1" latinLnBrk="0" hangingPunct="1">
+              <a:lnSpc>
+                <a:spcPct val="90000"/>
+              </a:lnSpc>
+              <a:spcBef>
+                <a:spcPts val="500"/>
+              </a:spcBef>
+              <a:buFont typeface="Arial" panose="020B0604020202020204" pitchFamily="34" charset="0"/>
+              <a:buChar char="•"/>
+              <a:defRPr sz="1800" kern="1200">
+                <a:solidFill>
+                  <a:schemeClr val="tx1"/>
+                </a:solidFill>
+                <a:latin typeface="+mn-lt"/>
+                <a:ea typeface="+mn-ea"/>
+                <a:cs typeface="+mn-cs"/>
+              </a:defRPr>
+            </a:lvl6pPr>
+            <a:lvl7pPr marL="2971800" indent="-228600" algn="l" defTabSz="914400" rtl="0" eaLnBrk="1" latinLnBrk="0" hangingPunct="1">
+              <a:lnSpc>
+                <a:spcPct val="90000"/>
+              </a:lnSpc>
+              <a:spcBef>
+                <a:spcPts val="500"/>
+              </a:spcBef>
+              <a:buFont typeface="Arial" panose="020B0604020202020204" pitchFamily="34" charset="0"/>
+              <a:buChar char="•"/>
+              <a:defRPr sz="1800" kern="1200">
+                <a:solidFill>
+                  <a:schemeClr val="tx1"/>
+                </a:solidFill>
+                <a:latin typeface="+mn-lt"/>
+                <a:ea typeface="+mn-ea"/>
+                <a:cs typeface="+mn-cs"/>
+              </a:defRPr>
+            </a:lvl7pPr>
+            <a:lvl8pPr marL="3429000" indent="-228600" algn="l" defTabSz="914400" rtl="0" eaLnBrk="1" latinLnBrk="0" hangingPunct="1">
+              <a:lnSpc>
+                <a:spcPct val="90000"/>
+              </a:lnSpc>
+              <a:spcBef>
+                <a:spcPts val="500"/>
+              </a:spcBef>
+              <a:buFont typeface="Arial" panose="020B0604020202020204" pitchFamily="34" charset="0"/>
+              <a:buChar char="•"/>
+              <a:defRPr sz="1800" kern="1200">
+                <a:solidFill>
+                  <a:schemeClr val="tx1"/>
+                </a:solidFill>
+                <a:latin typeface="+mn-lt"/>
+                <a:ea typeface="+mn-ea"/>
+                <a:cs typeface="+mn-cs"/>
+              </a:defRPr>
+            </a:lvl8pPr>
+            <a:lvl9pPr marL="3886200" indent="-228600" algn="l" defTabSz="914400" rtl="0" eaLnBrk="1" latinLnBrk="0" hangingPunct="1">
+              <a:lnSpc>
+                <a:spcPct val="90000"/>
+              </a:lnSpc>
+              <a:spcBef>
+                <a:spcPts val="500"/>
+              </a:spcBef>
+              <a:buFont typeface="Arial" panose="020B0604020202020204" pitchFamily="34" charset="0"/>
+              <a:buChar char="•"/>
+              <a:defRPr sz="1800" kern="1200">
+                <a:solidFill>
+                  <a:schemeClr val="tx1"/>
+                </a:solidFill>
+                <a:latin typeface="+mn-lt"/>
+                <a:ea typeface="+mn-ea"/>
+                <a:cs typeface="+mn-cs"/>
+              </a:defRPr>
+            </a:lvl9pPr>
+          </a:lstStyle>
+          <a:p>
+            <a:pPr>
+              <a:lnSpc>
+                <a:spcPct val="100000"/>
+              </a:lnSpc>
+              <a:spcBef>
+                <a:spcPts val="0"/>
+              </a:spcBef>
+            </a:pPr>
+            <a:endParaRPr lang="en-US" dirty="0">
+              <a:solidFill>
+                <a:srgbClr val="F36E21"/>
+              </a:solidFill>
+              <a:latin typeface="Quadon" panose="00000800000000000000" pitchFamily="50" charset="0"/>
+            </a:endParaRPr>
+          </a:p>
+          <a:p>
+            <a:pPr>
+              <a:lnSpc>
+                <a:spcPct val="100000"/>
+              </a:lnSpc>
+              <a:spcBef>
+                <a:spcPts val="0"/>
+              </a:spcBef>
+            </a:pPr>
+            <a:endParaRPr lang="en-US" dirty="0">
+              <a:solidFill>
+                <a:srgbClr val="F36E21"/>
+              </a:solidFill>
+              <a:latin typeface="Quadon" panose="00000800000000000000" pitchFamily="50" charset="0"/>
+            </a:endParaRPr>
+          </a:p>
+          <a:p>
+            <a:pPr>
+              <a:lnSpc>
+                <a:spcPct val="100000"/>
+              </a:lnSpc>
+              <a:spcBef>
+                <a:spcPts val="0"/>
+              </a:spcBef>
+            </a:pPr>
+            <a:endParaRPr lang="en-US" dirty="0">
+              <a:solidFill>
+                <a:srgbClr val="F36E21"/>
+              </a:solidFill>
+              <a:latin typeface="Quadon" panose="00000800000000000000" pitchFamily="50" charset="0"/>
+            </a:endParaRPr>
+          </a:p>
+          <a:p>
+            <a:pPr>
+              <a:lnSpc>
+                <a:spcPct val="100000"/>
+              </a:lnSpc>
+              <a:spcBef>
+                <a:spcPts val="0"/>
+              </a:spcBef>
+            </a:pPr>
+            <a:endParaRPr lang="en-US" dirty="0">
+              <a:solidFill>
+                <a:srgbClr val="F36E21"/>
+              </a:solidFill>
+              <a:latin typeface="Quadon" panose="00000800000000000000" pitchFamily="50" charset="0"/>
+            </a:endParaRPr>
+          </a:p>
+          <a:p>
+            <a:pPr>
+              <a:lnSpc>
+                <a:spcPct val="100000"/>
+              </a:lnSpc>
+              <a:spcBef>
+                <a:spcPts val="0"/>
+              </a:spcBef>
+            </a:pPr>
+            <a:endParaRPr lang="en-US" dirty="0">
+              <a:solidFill>
+                <a:srgbClr val="F36E21"/>
+              </a:solidFill>
+              <a:latin typeface="Quadon" panose="00000800000000000000" pitchFamily="50" charset="0"/>
+            </a:endParaRPr>
+          </a:p>
+          <a:p>
+            <a:pPr>
+              <a:lnSpc>
+                <a:spcPct val="100000"/>
+              </a:lnSpc>
+              <a:spcBef>
+                <a:spcPts val="0"/>
+              </a:spcBef>
+            </a:pPr>
+            <a:endParaRPr lang="en-US" dirty="0">
+              <a:solidFill>
+                <a:srgbClr val="F36E21"/>
+              </a:solidFill>
+              <a:latin typeface="Quadon" panose="00000800000000000000" pitchFamily="50" charset="0"/>
+            </a:endParaRPr>
+          </a:p>
+          <a:p>
+            <a:pPr>
+              <a:lnSpc>
+                <a:spcPct val="100000"/>
+              </a:lnSpc>
+              <a:spcBef>
+                <a:spcPts val="0"/>
+              </a:spcBef>
+            </a:pPr>
+            <a:endParaRPr lang="en-US" dirty="0">
+              <a:solidFill>
+                <a:srgbClr val="F36E21"/>
+              </a:solidFill>
+              <a:latin typeface="Quadon" panose="00000800000000000000" pitchFamily="50" charset="0"/>
+            </a:endParaRPr>
+          </a:p>
+          <a:p>
+            <a:pPr>
+              <a:lnSpc>
+                <a:spcPct val="100000"/>
+              </a:lnSpc>
+              <a:spcBef>
+                <a:spcPts val="0"/>
+              </a:spcBef>
+            </a:pPr>
+            <a:r>
+              <a:rPr lang="en-US" dirty="0">
+                <a:solidFill>
+                  <a:srgbClr val="D4D654"/>
+                </a:solidFill>
+                <a:latin typeface="Quadon" panose="00000800000000000000" pitchFamily="50" charset="0"/>
+              </a:rPr>
+              <a:t>GO TO </a:t>
+            </a:r>
+          </a:p>
+          <a:p>
+            <a:pPr>
+              <a:lnSpc>
+                <a:spcPct val="100000"/>
+              </a:lnSpc>
+              <a:spcBef>
+                <a:spcPts val="0"/>
+              </a:spcBef>
+            </a:pPr>
+            <a:r>
+              <a:rPr lang="en-US" dirty="0">
+                <a:solidFill>
+                  <a:schemeClr val="bg1"/>
+                </a:solidFill>
+                <a:latin typeface="Quadon" panose="00000800000000000000" pitchFamily="50" charset="0"/>
+              </a:rPr>
+              <a:t>	dataservices.library.jhu.edu </a:t>
+            </a:r>
+          </a:p>
+          <a:p>
+            <a:pPr>
+              <a:lnSpc>
+                <a:spcPct val="100000"/>
+              </a:lnSpc>
+              <a:spcBef>
+                <a:spcPts val="0"/>
+              </a:spcBef>
+            </a:pPr>
+            <a:endParaRPr lang="en-US" dirty="0">
+              <a:solidFill>
+                <a:srgbClr val="F36E21"/>
+              </a:solidFill>
+              <a:latin typeface="Quadon" panose="00000800000000000000" pitchFamily="50" charset="0"/>
+            </a:endParaRPr>
+          </a:p>
+          <a:p>
+            <a:pPr>
+              <a:lnSpc>
+                <a:spcPct val="100000"/>
+              </a:lnSpc>
+              <a:spcBef>
+                <a:spcPts val="0"/>
+              </a:spcBef>
+            </a:pPr>
+            <a:r>
+              <a:rPr lang="en-US" dirty="0">
+                <a:solidFill>
+                  <a:srgbClr val="D4D654"/>
+                </a:solidFill>
+                <a:latin typeface="Quadon" panose="00000800000000000000" pitchFamily="50" charset="0"/>
+              </a:rPr>
+              <a:t>EMAIL</a:t>
+            </a:r>
+            <a:r>
+              <a:rPr lang="en-US" dirty="0">
+                <a:solidFill>
+                  <a:srgbClr val="F36E21"/>
+                </a:solidFill>
+                <a:latin typeface="Quadon" panose="00000800000000000000" pitchFamily="50" charset="0"/>
+              </a:rPr>
+              <a:t> </a:t>
+            </a:r>
+          </a:p>
+          <a:p>
+            <a:pPr>
+              <a:lnSpc>
+                <a:spcPct val="100000"/>
+              </a:lnSpc>
+              <a:spcBef>
+                <a:spcPts val="0"/>
+              </a:spcBef>
+            </a:pPr>
+            <a:r>
+              <a:rPr lang="en-US" dirty="0">
+                <a:solidFill>
+                  <a:schemeClr val="bg1"/>
+                </a:solidFill>
+                <a:latin typeface="Quadon" panose="00000800000000000000" pitchFamily="50" charset="0"/>
+              </a:rPr>
+              <a:t>	dataservices@jhu.edu </a:t>
+            </a:r>
+          </a:p>
+          <a:p>
+            <a:pPr>
+              <a:lnSpc>
+                <a:spcPct val="100000"/>
+              </a:lnSpc>
+              <a:spcBef>
+                <a:spcPts val="0"/>
+              </a:spcBef>
+            </a:pPr>
+            <a:endParaRPr lang="en-US" dirty="0">
+              <a:solidFill>
+                <a:srgbClr val="F36E21"/>
+              </a:solidFill>
+              <a:latin typeface="Quadon" panose="00000800000000000000" pitchFamily="50" charset="0"/>
+            </a:endParaRPr>
+          </a:p>
+          <a:p>
+            <a:pPr>
+              <a:lnSpc>
+                <a:spcPct val="100000"/>
+              </a:lnSpc>
+              <a:spcBef>
+                <a:spcPts val="0"/>
+              </a:spcBef>
+            </a:pPr>
+            <a:r>
+              <a:rPr lang="en-US" dirty="0">
+                <a:solidFill>
+                  <a:srgbClr val="D4D654"/>
+                </a:solidFill>
+                <a:latin typeface="Quadon" panose="00000800000000000000" pitchFamily="50" charset="0"/>
+              </a:rPr>
+              <a:t>SHARE DATA AT</a:t>
+            </a:r>
+          </a:p>
+          <a:p>
+            <a:pPr>
+              <a:lnSpc>
+                <a:spcPct val="100000"/>
+              </a:lnSpc>
+              <a:spcBef>
+                <a:spcPts val="0"/>
+              </a:spcBef>
+            </a:pPr>
+            <a:r>
+              <a:rPr lang="en-US" dirty="0">
+                <a:solidFill>
+                  <a:schemeClr val="bg1"/>
+                </a:solidFill>
+                <a:latin typeface="Quadon" panose="00000800000000000000" pitchFamily="50" charset="0"/>
+              </a:rPr>
+              <a:t>	archive.data.jhu.edu</a:t>
+            </a:r>
+          </a:p>
+        </p:txBody>
+      </p:sp>
+      <p:pic>
+        <p:nvPicPr>
+          <p:cNvPr id="14" name="Picture 13">
+            <a:extLst>
+              <a:ext uri="{FF2B5EF4-FFF2-40B4-BE49-F238E27FC236}">
+                <a16:creationId xmlns:a16="http://schemas.microsoft.com/office/drawing/2014/main" id="{8F50D060-2052-40B3-5A37-3B4E4088002A}"/>
+              </a:ext>
+            </a:extLst>
+          </p:cNvPr>
+          <p:cNvPicPr>
+            <a:picLocks noChangeAspect="1"/>
+          </p:cNvPicPr>
+          <p:nvPr/>
+        </p:nvPicPr>
+        <p:blipFill>
+          <a:blip r:embed="rId2">
+            <a:extLst>
+              <a:ext uri="{28A0092B-C50C-407E-A947-70E740481C1C}">
+                <a14:useLocalDpi xmlns:a14="http://schemas.microsoft.com/office/drawing/2010/main" val="0"/>
+              </a:ext>
+            </a:extLst>
+          </a:blip>
+          <a:stretch>
+            <a:fillRect/>
+          </a:stretch>
+        </p:blipFill>
+        <p:spPr>
+          <a:xfrm>
+            <a:off x="7604593" y="5730950"/>
+            <a:ext cx="4672466" cy="1127050"/>
+          </a:xfrm>
+          <a:prstGeom prst="rect">
+            <a:avLst/>
+          </a:prstGeom>
+        </p:spPr>
+      </p:pic>
+      <p:pic>
+        <p:nvPicPr>
+          <p:cNvPr id="15" name="Picture 14">
+            <a:extLst>
+              <a:ext uri="{FF2B5EF4-FFF2-40B4-BE49-F238E27FC236}">
+                <a16:creationId xmlns:a16="http://schemas.microsoft.com/office/drawing/2014/main" id="{06AF349E-243A-D6F2-26E8-10A0AF0E17AB}"/>
+              </a:ext>
+            </a:extLst>
+          </p:cNvPr>
+          <p:cNvPicPr>
+            <a:picLocks noChangeAspect="1"/>
+          </p:cNvPicPr>
+          <p:nvPr/>
+        </p:nvPicPr>
+        <p:blipFill>
+          <a:blip r:embed="rId3" cstate="print">
+            <a:extLst>
+              <a:ext uri="{28A0092B-C50C-407E-A947-70E740481C1C}">
+                <a14:useLocalDpi xmlns:a14="http://schemas.microsoft.com/office/drawing/2010/main" val="0"/>
+              </a:ext>
+            </a:extLst>
+          </a:blip>
+          <a:stretch>
+            <a:fillRect/>
+          </a:stretch>
+        </p:blipFill>
+        <p:spPr>
+          <a:xfrm>
+            <a:off x="6906411" y="940336"/>
+            <a:ext cx="1523393" cy="1841300"/>
+          </a:xfrm>
+          <a:prstGeom prst="rect">
+            <a:avLst/>
+          </a:prstGeom>
+        </p:spPr>
+      </p:pic>
+      <p:pic>
+        <p:nvPicPr>
+          <p:cNvPr id="16" name="Picture 15">
+            <a:extLst>
+              <a:ext uri="{FF2B5EF4-FFF2-40B4-BE49-F238E27FC236}">
+                <a16:creationId xmlns:a16="http://schemas.microsoft.com/office/drawing/2014/main" id="{682E9D13-F3F8-5EA0-3E94-E9C02C387038}"/>
+              </a:ext>
+            </a:extLst>
+          </p:cNvPr>
+          <p:cNvPicPr>
+            <a:picLocks noChangeAspect="1"/>
+          </p:cNvPicPr>
+          <p:nvPr/>
+        </p:nvPicPr>
+        <p:blipFill>
+          <a:blip r:embed="rId4" cstate="print">
+            <a:extLst>
+              <a:ext uri="{28A0092B-C50C-407E-A947-70E740481C1C}">
+                <a14:useLocalDpi xmlns:a14="http://schemas.microsoft.com/office/drawing/2010/main" val="0"/>
+              </a:ext>
+            </a:extLst>
+          </a:blip>
+          <a:stretch>
+            <a:fillRect/>
+          </a:stretch>
+        </p:blipFill>
+        <p:spPr>
+          <a:xfrm>
+            <a:off x="9124515" y="978281"/>
+            <a:ext cx="1459385" cy="1841300"/>
+          </a:xfrm>
+          <a:prstGeom prst="rect">
+            <a:avLst/>
+          </a:prstGeom>
+        </p:spPr>
+      </p:pic>
+      <p:pic>
+        <p:nvPicPr>
+          <p:cNvPr id="17" name="Picture 16">
+            <a:extLst>
+              <a:ext uri="{FF2B5EF4-FFF2-40B4-BE49-F238E27FC236}">
+                <a16:creationId xmlns:a16="http://schemas.microsoft.com/office/drawing/2014/main" id="{839402BF-C3B5-8447-190D-91B832678975}"/>
+              </a:ext>
+            </a:extLst>
+          </p:cNvPr>
+          <p:cNvPicPr>
+            <a:picLocks noChangeAspect="1"/>
+          </p:cNvPicPr>
+          <p:nvPr/>
+        </p:nvPicPr>
+        <p:blipFill>
+          <a:blip r:embed="rId5" cstate="print">
+            <a:extLst>
+              <a:ext uri="{28A0092B-C50C-407E-A947-70E740481C1C}">
+                <a14:useLocalDpi xmlns:a14="http://schemas.microsoft.com/office/drawing/2010/main" val="0"/>
+              </a:ext>
+            </a:extLst>
+          </a:blip>
+          <a:stretch>
+            <a:fillRect/>
+          </a:stretch>
+        </p:blipFill>
+        <p:spPr>
+          <a:xfrm>
+            <a:off x="5821890" y="2762598"/>
+            <a:ext cx="1574600" cy="1841300"/>
+          </a:xfrm>
+          <a:prstGeom prst="rect">
+            <a:avLst/>
+          </a:prstGeom>
+        </p:spPr>
+      </p:pic>
+      <p:pic>
+        <p:nvPicPr>
+          <p:cNvPr id="18" name="Picture 17">
+            <a:extLst>
+              <a:ext uri="{FF2B5EF4-FFF2-40B4-BE49-F238E27FC236}">
+                <a16:creationId xmlns:a16="http://schemas.microsoft.com/office/drawing/2014/main" id="{121949DE-0AA5-D918-7578-61F07510E843}"/>
+              </a:ext>
+            </a:extLst>
+          </p:cNvPr>
+          <p:cNvPicPr>
+            <a:picLocks noChangeAspect="1"/>
+          </p:cNvPicPr>
+          <p:nvPr/>
+        </p:nvPicPr>
+        <p:blipFill>
+          <a:blip r:embed="rId6" cstate="print">
+            <a:extLst>
+              <a:ext uri="{28A0092B-C50C-407E-A947-70E740481C1C}">
+                <a14:useLocalDpi xmlns:a14="http://schemas.microsoft.com/office/drawing/2010/main" val="0"/>
+              </a:ext>
+            </a:extLst>
+          </a:blip>
+          <a:stretch>
+            <a:fillRect/>
+          </a:stretch>
+        </p:blipFill>
+        <p:spPr>
+          <a:xfrm>
+            <a:off x="8119425" y="2781636"/>
+            <a:ext cx="1521260" cy="1841300"/>
+          </a:xfrm>
+          <a:prstGeom prst="rect">
+            <a:avLst/>
+          </a:prstGeom>
+        </p:spPr>
+      </p:pic>
+      <p:pic>
+        <p:nvPicPr>
+          <p:cNvPr id="19" name="Picture 18">
+            <a:extLst>
+              <a:ext uri="{FF2B5EF4-FFF2-40B4-BE49-F238E27FC236}">
+                <a16:creationId xmlns:a16="http://schemas.microsoft.com/office/drawing/2014/main" id="{1625C7BF-6F4A-AA61-A010-34E921576F5B}"/>
+              </a:ext>
+            </a:extLst>
+          </p:cNvPr>
+          <p:cNvPicPr>
+            <a:picLocks noChangeAspect="1"/>
+          </p:cNvPicPr>
+          <p:nvPr/>
+        </p:nvPicPr>
+        <p:blipFill>
+          <a:blip r:embed="rId7" cstate="print">
+            <a:extLst>
+              <a:ext uri="{28A0092B-C50C-407E-A947-70E740481C1C}">
+                <a14:useLocalDpi xmlns:a14="http://schemas.microsoft.com/office/drawing/2010/main" val="0"/>
+              </a:ext>
+            </a:extLst>
+          </a:blip>
+          <a:stretch>
+            <a:fillRect/>
+          </a:stretch>
+        </p:blipFill>
+        <p:spPr>
+          <a:xfrm>
+            <a:off x="10363620" y="2781636"/>
+            <a:ext cx="1484988" cy="1841300"/>
+          </a:xfrm>
+          <a:prstGeom prst="rect">
+            <a:avLst/>
+          </a:prstGeom>
+        </p:spPr>
+      </p:pic>
+      <p:sp>
+        <p:nvSpPr>
+          <p:cNvPr id="20" name="TextBox 19">
+            <a:extLst>
+              <a:ext uri="{FF2B5EF4-FFF2-40B4-BE49-F238E27FC236}">
+                <a16:creationId xmlns:a16="http://schemas.microsoft.com/office/drawing/2014/main" id="{3EA2435C-FFBC-058D-3CC7-5DD452E911FB}"/>
+              </a:ext>
+            </a:extLst>
+          </p:cNvPr>
           <p:cNvSpPr txBox="1"/>
           <p:nvPr/>
         </p:nvSpPr>
         <p:spPr>
           <a:xfrm>
-            <a:off x="1788200" y="1975625"/>
-            <a:ext cx="3950000" cy="1550000"/>
+            <a:off x="7328177" y="222919"/>
+            <a:ext cx="3592676" cy="646331"/>
           </a:xfrm>
           <a:prstGeom prst="rect">
             <a:avLst/>
           </a:prstGeom>
           <a:noFill/>
-          <a:ln>
-            <a:noFill/>
-          </a:ln>
-        </p:spPr>
-        <p:txBody>
-          <a:bodyPr wrap="square" lIns="91440" tIns="45720" rIns="91440" bIns="45720" anchor="t">
-            <a:noAutofit/>
+        </p:spPr>
+        <p:txBody>
+          <a:bodyPr wrap="square" rtlCol="0" anchor="t">
+            <a:spAutoFit/>
           </a:bodyPr>
           <a:lstStyle/>
           <a:p>
-            <a:pPr algn="l">
-              <a:spcAft>
-                <a:spcPts val="400"/>
-              </a:spcAft>
-              <a:buNone/>
-            </a:pPr>
-            <a:r>
-              <a:rPr lang="en-US" sz="2200" dirty="0">
-                <a:solidFill>
-                  <a:srgbClr val="002D72"/>
-                </a:solidFill>
-                <a:latin typeface="Inter Medium"/>
-                <a:ea typeface="Inter Medium"/>
+            <a:r>
+              <a:rPr lang="en-US" sz="3600" spc="200">
+                <a:solidFill>
+                  <a:srgbClr val="24356F"/>
+                </a:solidFill>
+                <a:latin typeface="Quadon MediumItalic"/>
               </a:rPr>
-              <a:t>Explain in markdown</a:t>
-            </a:r>
-          </a:p>
-          <a:p>
-            <a:pPr algn="l">
-              <a:spcAft>
-                <a:spcPts val="0"/>
-              </a:spcAft>
-              <a:buNone/>
-            </a:pPr>
-            <a:r>
-              <a:rPr lang="en-US" sz="1800" dirty="0">
-                <a:solidFill>
-                  <a:srgbClr val="404040"/>
-                </a:solidFill>
-                <a:latin typeface="Inter"/>
-                <a:ea typeface="Inter"/>
-              </a:rPr>
-              <a:t>Add a title, a purpose, and a heading before each step.</a:t>
-            </a:r>
-          </a:p>
-        </p:txBody>
-      </p:sp>
-      <p:sp>
-        <p:nvSpPr>
-          <p:cNvPr id="8" name="Card 6 text"/>
+              <a:t>Helping you</a:t>
+            </a:r>
+            <a:endParaRPr lang="en-US" sz="3600" spc="200">
+              <a:solidFill>
+                <a:srgbClr val="24356F"/>
+              </a:solidFill>
+              <a:latin typeface="Quadon MediumItalic" panose="00000600000000000000" pitchFamily="50" charset="0"/>
+            </a:endParaRPr>
+          </a:p>
+        </p:txBody>
+      </p:sp>
+      <p:sp>
+        <p:nvSpPr>
+          <p:cNvPr id="21" name="TextBox 20">
+            <a:extLst>
+              <a:ext uri="{FF2B5EF4-FFF2-40B4-BE49-F238E27FC236}">
+                <a16:creationId xmlns:a16="http://schemas.microsoft.com/office/drawing/2014/main" id="{8DF01AD2-14B3-F74F-64ED-F545DC158C5C}"/>
+              </a:ext>
+            </a:extLst>
+          </p:cNvPr>
           <p:cNvSpPr txBox="1"/>
           <p:nvPr/>
         </p:nvSpPr>
         <p:spPr>
           <a:xfrm>
-            <a:off x="7203800" y="1975625"/>
-            <a:ext cx="3950000" cy="1550000"/>
+            <a:off x="7888656" y="4877748"/>
+            <a:ext cx="2052170" cy="646331"/>
           </a:xfrm>
           <a:prstGeom prst="rect">
             <a:avLst/>
           </a:prstGeom>
           <a:noFill/>
-          <a:ln>
-            <a:noFill/>
-          </a:ln>
-        </p:spPr>
-        <p:txBody>
-          <a:bodyPr wrap="square" lIns="91440" tIns="45720" rIns="91440" bIns="45720" anchor="t">
-            <a:noAutofit/>
+        </p:spPr>
+        <p:txBody>
+          <a:bodyPr wrap="square" rtlCol="0">
+            <a:spAutoFit/>
           </a:bodyPr>
           <a:lstStyle/>
           <a:p>
-            <a:pPr algn="l">
-              <a:spcAft>
-                <a:spcPts val="400"/>
-              </a:spcAft>
-              <a:buNone/>
-            </a:pPr>
-            <a:r>
-              <a:rPr lang="en-US" sz="2200" dirty="0">
-                <a:solidFill>
-                  <a:srgbClr val="002D72"/>
-                </a:solidFill>
-                <a:latin typeface="Inter Medium"/>
-                <a:ea typeface="Inter Medium"/>
+            <a:pPr algn="ctr"/>
+            <a:r>
+              <a:rPr lang="en-US" sz="3600" spc="200">
+                <a:solidFill>
+                  <a:srgbClr val="24356F"/>
+                </a:solidFill>
+                <a:latin typeface="Quadon MediumItalic" panose="00000600000000000000" pitchFamily="50" charset="0"/>
               </a:rPr>
-              <a:t>Record your environment</a:t>
-            </a:r>
-          </a:p>
-          <a:p>
-            <a:pPr algn="l">
-              <a:spcAft>
-                <a:spcPts val="0"/>
-              </a:spcAft>
-              <a:buNone/>
-            </a:pPr>
-            <a:r>
-              <a:rPr lang="en-US" sz="1800" dirty="0">
-                <a:solidFill>
-                  <a:srgbClr val="404040"/>
-                </a:solidFill>
-                <a:latin typeface="Inter"/>
-                <a:ea typeface="Inter"/>
-              </a:rPr>
-              <a:t>List package versions in environment.yml or requirements.txt.</a:t>
-            </a:r>
-          </a:p>
-        </p:txBody>
-      </p:sp>
-      <p:sp>
-        <p:nvSpPr>
-          <p:cNvPr id="11" name="Card 7 text"/>
-          <p:cNvSpPr txBox="1"/>
-          <p:nvPr/>
-        </p:nvSpPr>
-        <p:spPr>
-          <a:xfrm>
-            <a:off x="1788200" y="4025625"/>
-            <a:ext cx="3950000" cy="1550000"/>
-          </a:xfrm>
-          <a:prstGeom prst="rect">
-            <a:avLst/>
-          </a:prstGeom>
-          <a:noFill/>
-          <a:ln>
-            <a:noFill/>
-          </a:ln>
-        </p:spPr>
-        <p:txBody>
-          <a:bodyPr wrap="square" lIns="91440" tIns="45720" rIns="91440" bIns="45720" anchor="t">
-            <a:noAutofit/>
-          </a:bodyPr>
-          <a:lstStyle/>
-          <a:p>
-            <a:pPr algn="l">
-              <a:spcAft>
-                <a:spcPts val="400"/>
-              </a:spcAft>
-              <a:buNone/>
-            </a:pPr>
-            <a:r>
-              <a:rPr lang="en-US" sz="2200" dirty="0">
-                <a:solidFill>
-                  <a:srgbClr val="002D72"/>
-                </a:solidFill>
-                <a:latin typeface="Inter Medium"/>
-                <a:ea typeface="Inter Medium"/>
-              </a:rPr>
-              <a:t>Separate the stages</a:t>
-            </a:r>
-          </a:p>
-          <a:p>
-            <a:pPr algn="l">
-              <a:spcAft>
-                <a:spcPts val="0"/>
-              </a:spcAft>
-              <a:buNone/>
-            </a:pPr>
-            <a:r>
-              <a:rPr lang="en-US" dirty="0">
-                <a:solidFill>
-                  <a:srgbClr val="404040"/>
-                </a:solidFill>
-                <a:latin typeface="Inter"/>
-                <a:ea typeface="Inter"/>
-              </a:rPr>
-              <a:t>Separate the major steps of your analysis, such as cleaning, analysis, and visualization</a:t>
-            </a:r>
-          </a:p>
-          <a:p>
-            <a:pPr algn="l">
-              <a:spcAft>
-                <a:spcPts val="0"/>
-              </a:spcAft>
-              <a:buNone/>
-            </a:pPr>
-            <a:endParaRPr lang="en-US" sz="1800" dirty="0">
-              <a:solidFill>
-                <a:srgbClr val="404040"/>
-              </a:solidFill>
-              <a:latin typeface="Inter"/>
-              <a:ea typeface="Inter"/>
-            </a:endParaRPr>
-          </a:p>
-        </p:txBody>
-      </p:sp>
-      <p:sp>
-        <p:nvSpPr>
-          <p:cNvPr id="14" name="Card 8 text"/>
-          <p:cNvSpPr txBox="1"/>
-          <p:nvPr/>
-        </p:nvSpPr>
-        <p:spPr>
-          <a:xfrm>
-            <a:off x="7203800" y="4025625"/>
-            <a:ext cx="3950000" cy="1550000"/>
-          </a:xfrm>
-          <a:prstGeom prst="rect">
-            <a:avLst/>
-          </a:prstGeom>
-          <a:noFill/>
-          <a:ln>
-            <a:noFill/>
-          </a:ln>
-        </p:spPr>
-        <p:txBody>
-          <a:bodyPr wrap="square" lIns="91440" tIns="45720" rIns="91440" bIns="45720" anchor="t">
-            <a:noAutofit/>
-          </a:bodyPr>
-          <a:lstStyle/>
-          <a:p>
-            <a:pPr algn="l">
-              <a:spcAft>
-                <a:spcPts val="400"/>
-              </a:spcAft>
-              <a:buNone/>
-            </a:pPr>
-            <a:r>
-              <a:rPr lang="en-US" sz="2200" dirty="0">
-                <a:solidFill>
-                  <a:srgbClr val="002D72"/>
-                </a:solidFill>
-                <a:latin typeface="Inter Medium"/>
-                <a:ea typeface="Inter Medium"/>
-              </a:rPr>
-              <a:t>Add a README</a:t>
-            </a:r>
-          </a:p>
-          <a:p>
-            <a:pPr algn="l">
-              <a:spcAft>
-                <a:spcPts val="0"/>
-              </a:spcAft>
-              <a:buNone/>
-            </a:pPr>
-            <a:r>
-              <a:rPr lang="en-US" sz="1800" dirty="0">
-                <a:solidFill>
-                  <a:srgbClr val="404040"/>
-                </a:solidFill>
-                <a:latin typeface="Inter"/>
-                <a:ea typeface="Inter"/>
-              </a:rPr>
-              <a:t>Say what the project is, how to run it, and what each file does.</a:t>
+              <a:t>DATA</a:t>
             </a:r>
           </a:p>
         </p:txBody>
       </p:sp>
     </p:spTree>
+    <p:extLst>
+      <p:ext uri="{BB962C8B-B14F-4D97-AF65-F5344CB8AC3E}">
+        <p14:creationId xmlns:p14="http://schemas.microsoft.com/office/powerpoint/2010/main" val="1772265977"/>
+      </p:ext>
+    </p:extLst>
   </p:cSld>
   <p:clrMapOvr>
     <a:masterClrMapping/>
@@ -9224,14 +10096,14 @@
           <p:nvPr>
             <p:extLst>
               <p:ext uri="{D42A27DB-BD31-4B8C-83A1-F6EECF244321}">
-                <p14:modId xmlns:p14="http://schemas.microsoft.com/office/powerpoint/2010/main" val="2134684263"/>
+                <p14:modId xmlns:p14="http://schemas.microsoft.com/office/powerpoint/2010/main" val="2004035645"/>
               </p:ext>
             </p:extLst>
           </p:nvPr>
         </p:nvGraphicFramePr>
         <p:xfrm>
           <a:off x="838200" y="1945640"/>
-          <a:ext cx="8128000" cy="1483360"/>
+          <a:ext cx="8128000" cy="5029200"/>
         </p:xfrm>
         <a:graphic>
           <a:graphicData uri="http://schemas.openxmlformats.org/drawingml/2006/table">
@@ -9240,14 +10112,14 @@
                 <a:tableStyleId>{5C22544A-7EE6-4342-B048-85BDC9FD1C3A}</a:tableStyleId>
               </a:tblPr>
               <a:tblGrid>
-                <a:gridCol w="4064000">
+                <a:gridCol w="2287044">
                   <a:extLst>
                     <a:ext uri="{9D8B030D-6E8A-4147-A177-3AD203B41FA5}">
                       <a16:colId xmlns:a16="http://schemas.microsoft.com/office/drawing/2014/main" val="4249466107"/>
                     </a:ext>
                   </a:extLst>
                 </a:gridCol>
-                <a:gridCol w="4064000">
+                <a:gridCol w="5840956">
                   <a:extLst>
                     <a:ext uri="{9D8B030D-6E8A-4147-A177-3AD203B41FA5}">
                       <a16:colId xmlns:a16="http://schemas.microsoft.com/office/drawing/2014/main" val="2707303974"/>
@@ -9262,11 +10134,11 @@
                     <a:lstStyle/>
                     <a:p>
                       <a:r>
-                        <a:rPr lang="en-US" b="0" dirty="0">
+                        <a:rPr lang="en-US" b="1" dirty="0">
                           <a:solidFill>
                             <a:schemeClr val="tx1">
-                              <a:lumMod val="85000"/>
-                              <a:lumOff val="15000"/>
+                              <a:lumMod val="75000"/>
+                              <a:lumOff val="25000"/>
                             </a:schemeClr>
                           </a:solidFill>
                           <a:latin typeface="Inter" panose="02000503000000020004" pitchFamily="2" charset="0"/>
@@ -9305,7 +10177,31 @@
                     <a:bodyPr/>
                     <a:lstStyle/>
                     <a:p>
-                      <a:endParaRPr lang="en-US" dirty="0"/>
+                      <a:r>
+                        <a:rPr lang="en-US" b="0" dirty="0">
+                          <a:solidFill>
+                            <a:schemeClr val="tx1">
+                              <a:lumMod val="75000"/>
+                              <a:lumOff val="25000"/>
+                            </a:schemeClr>
+                          </a:solidFill>
+                          <a:latin typeface="Inter" panose="02000503000000020004" pitchFamily="2" charset="0"/>
+                          <a:ea typeface="Inter" panose="02000503000000020004" pitchFamily="2" charset="0"/>
+                        </a:rPr>
+                        <a:t>A shareable document that combines computer code, plain language descriptions, data, rich visualizations like 3D models, charts, graphs and figures, and interactive controls.</a:t>
+                      </a:r>
+                    </a:p>
+                    <a:p>
+                      <a:endParaRPr lang="en-US" b="0" dirty="0">
+                        <a:solidFill>
+                          <a:schemeClr val="tx1">
+                            <a:lumMod val="75000"/>
+                            <a:lumOff val="25000"/>
+                          </a:schemeClr>
+                        </a:solidFill>
+                        <a:latin typeface="Inter" panose="02000503000000020004" pitchFamily="2" charset="0"/>
+                        <a:ea typeface="Inter" panose="02000503000000020004" pitchFamily="2" charset="0"/>
+                      </a:endParaRPr>
                     </a:p>
                   </a:txBody>
                   <a:tcPr>
@@ -9344,7 +10240,19 @@
                     <a:bodyPr/>
                     <a:lstStyle/>
                     <a:p>
-                      <a:endParaRPr lang="en-US" dirty="0"/>
+                      <a:r>
+                        <a:rPr lang="en-US" b="1" dirty="0">
+                          <a:solidFill>
+                            <a:schemeClr val="tx1">
+                              <a:lumMod val="75000"/>
+                              <a:lumOff val="25000"/>
+                            </a:schemeClr>
+                          </a:solidFill>
+                          <a:latin typeface="Inter" panose="02000503000000020004" pitchFamily="2" charset="0"/>
+                          <a:ea typeface="Inter" panose="02000503000000020004" pitchFamily="2" charset="0"/>
+                        </a:rPr>
+                        <a:t>Jupyter Lab</a:t>
+                      </a:r>
                     </a:p>
                   </a:txBody>
                   <a:tcPr>
@@ -9376,7 +10284,31 @@
                     <a:bodyPr/>
                     <a:lstStyle/>
                     <a:p>
-                      <a:endParaRPr lang="en-US" dirty="0"/>
+                      <a:r>
+                        <a:rPr lang="en-US" b="0" dirty="0">
+                          <a:solidFill>
+                            <a:schemeClr val="tx1">
+                              <a:lumMod val="75000"/>
+                              <a:lumOff val="25000"/>
+                            </a:schemeClr>
+                          </a:solidFill>
+                          <a:latin typeface="Inter" panose="02000503000000020004" pitchFamily="2" charset="0"/>
+                          <a:ea typeface="Inter" panose="02000503000000020004" pitchFamily="2" charset="0"/>
+                        </a:rPr>
+                        <a:t>An interactive development environment (IDE) for editing and running notebooks, scripts, and data. </a:t>
+                      </a:r>
+                    </a:p>
+                    <a:p>
+                      <a:endParaRPr lang="en-US" b="0" dirty="0">
+                        <a:solidFill>
+                          <a:schemeClr val="tx1">
+                            <a:lumMod val="75000"/>
+                            <a:lumOff val="25000"/>
+                          </a:schemeClr>
+                        </a:solidFill>
+                        <a:latin typeface="Inter" panose="02000503000000020004" pitchFamily="2" charset="0"/>
+                        <a:ea typeface="Inter" panose="02000503000000020004" pitchFamily="2" charset="0"/>
+                      </a:endParaRPr>
                     </a:p>
                   </a:txBody>
                   <a:tcPr>
@@ -9415,7 +10347,19 @@
                     <a:bodyPr/>
                     <a:lstStyle/>
                     <a:p>
-                      <a:endParaRPr lang="en-US"/>
+                      <a:r>
+                        <a:rPr lang="en-US" b="1" dirty="0">
+                          <a:solidFill>
+                            <a:schemeClr val="tx1">
+                              <a:lumMod val="75000"/>
+                              <a:lumOff val="25000"/>
+                            </a:schemeClr>
+                          </a:solidFill>
+                          <a:latin typeface="Inter" panose="02000503000000020004" pitchFamily="2" charset="0"/>
+                          <a:ea typeface="Inter" panose="02000503000000020004" pitchFamily="2" charset="0"/>
+                        </a:rPr>
+                        <a:t>Kernel</a:t>
+                      </a:r>
                     </a:p>
                   </a:txBody>
                   <a:tcPr>
@@ -9447,7 +10391,65 @@
                     <a:bodyPr/>
                     <a:lstStyle/>
                     <a:p>
-                      <a:endParaRPr lang="en-US" dirty="0"/>
+                      <a:pPr marL="0" marR="0" indent="0" algn="l" defTabSz="914400" rtl="0" eaLnBrk="1" fontAlgn="auto" latinLnBrk="0" hangingPunct="1">
+                        <a:lnSpc>
+                          <a:spcPct val="100000"/>
+                        </a:lnSpc>
+                        <a:spcBef>
+                          <a:spcPts val="0"/>
+                        </a:spcBef>
+                        <a:spcAft>
+                          <a:spcPts val="0"/>
+                        </a:spcAft>
+                        <a:buClrTx/>
+                        <a:buSzTx/>
+                        <a:buFontTx/>
+                        <a:buNone/>
+                        <a:tabLst/>
+                        <a:defRPr/>
+                      </a:pPr>
+                      <a:r>
+                        <a:rPr lang="en-US" b="0" dirty="0">
+                          <a:solidFill>
+                            <a:schemeClr val="tx1">
+                              <a:lumMod val="75000"/>
+                              <a:lumOff val="25000"/>
+                            </a:schemeClr>
+                          </a:solidFill>
+                          <a:latin typeface="Inter" panose="02000503000000020004" pitchFamily="2" charset="0"/>
+                          <a:ea typeface="Inter" panose="02000503000000020004" pitchFamily="2" charset="0"/>
+                        </a:rPr>
+                        <a:t>Kernels are separate processes started by the server that run your code in different programming languages and environments</a:t>
+                      </a:r>
+                    </a:p>
+                    <a:p>
+                      <a:pPr marL="0" marR="0" indent="0" algn="l" defTabSz="914400" rtl="0" eaLnBrk="1" fontAlgn="auto" latinLnBrk="0" hangingPunct="1">
+                        <a:lnSpc>
+                          <a:spcPct val="100000"/>
+                        </a:lnSpc>
+                        <a:spcBef>
+                          <a:spcPts val="0"/>
+                        </a:spcBef>
+                        <a:spcAft>
+                          <a:spcPts val="0"/>
+                        </a:spcAft>
+                        <a:buClrTx/>
+                        <a:buSzTx/>
+                        <a:buFontTx/>
+                        <a:buNone/>
+                        <a:tabLst/>
+                        <a:defRPr/>
+                      </a:pPr>
+                      <a:endParaRPr lang="en-US" b="0" dirty="0">
+                        <a:solidFill>
+                          <a:schemeClr val="tx1">
+                            <a:lumMod val="75000"/>
+                            <a:lumOff val="25000"/>
+                          </a:schemeClr>
+                        </a:solidFill>
+                        <a:latin typeface="Inter" panose="02000503000000020004" pitchFamily="2" charset="0"/>
+                        <a:ea typeface="Inter" panose="02000503000000020004" pitchFamily="2" charset="0"/>
+                      </a:endParaRPr>
                     </a:p>
                   </a:txBody>
                   <a:tcPr>
@@ -9486,7 +10488,29 @@
                     <a:bodyPr/>
                     <a:lstStyle/>
                     <a:p>
-                      <a:endParaRPr lang="en-US"/>
+                      <a:r>
+                        <a:rPr lang="en-US" b="1" dirty="0" err="1">
+                          <a:solidFill>
+                            <a:schemeClr val="tx1">
+                              <a:lumMod val="75000"/>
+                              <a:lumOff val="25000"/>
+                            </a:schemeClr>
+                          </a:solidFill>
+                          <a:latin typeface="Inter" panose="02000503000000020004" pitchFamily="2" charset="0"/>
+                          <a:ea typeface="Inter" panose="02000503000000020004" pitchFamily="2" charset="0"/>
+                        </a:rPr>
+                        <a:t>IPython</a:t>
+                      </a:r>
+                      <a:endParaRPr lang="en-US" b="1" dirty="0">
+                        <a:solidFill>
+                          <a:schemeClr val="tx1">
+                            <a:lumMod val="75000"/>
+                            <a:lumOff val="25000"/>
+                          </a:schemeClr>
+                        </a:solidFill>
+                        <a:latin typeface="Inter" panose="02000503000000020004" pitchFamily="2" charset="0"/>
+                        <a:ea typeface="Inter" panose="02000503000000020004" pitchFamily="2" charset="0"/>
+                      </a:endParaRPr>
                     </a:p>
                   </a:txBody>
                   <a:tcPr>
@@ -9518,7 +10542,57 @@
                     <a:bodyPr/>
                     <a:lstStyle/>
                     <a:p>
-                      <a:endParaRPr lang="en-US" dirty="0"/>
+                      <a:r>
+                        <a:rPr lang="en-US" b="0" dirty="0">
+                          <a:solidFill>
+                            <a:schemeClr val="tx1">
+                              <a:lumMod val="75000"/>
+                              <a:lumOff val="25000"/>
+                            </a:schemeClr>
+                          </a:solidFill>
+                          <a:latin typeface="Inter" panose="02000503000000020004" pitchFamily="2" charset="0"/>
+                          <a:ea typeface="Inter" panose="02000503000000020004" pitchFamily="2" charset="0"/>
+                        </a:rPr>
+                        <a:t>Python (Interactive Python) was created by Fernando Pérez in 2001 as a more powerful interactive shell for Python. </a:t>
+                      </a:r>
+                      <a:r>
+                        <a:rPr lang="en-US" b="0" dirty="0" err="1">
+                          <a:solidFill>
+                            <a:schemeClr val="tx1">
+                              <a:lumMod val="75000"/>
+                              <a:lumOff val="25000"/>
+                            </a:schemeClr>
+                          </a:solidFill>
+                          <a:latin typeface="Inter" panose="02000503000000020004" pitchFamily="2" charset="0"/>
+                          <a:ea typeface="Inter" panose="02000503000000020004" pitchFamily="2" charset="0"/>
+                        </a:rPr>
+                        <a:t>IPython</a:t>
+                      </a:r>
+                      <a:r>
+                        <a:rPr lang="en-US" b="0" dirty="0">
+                          <a:solidFill>
+                            <a:schemeClr val="tx1">
+                              <a:lumMod val="75000"/>
+                              <a:lumOff val="25000"/>
+                            </a:schemeClr>
+                          </a:solidFill>
+                          <a:latin typeface="Inter" panose="02000503000000020004" pitchFamily="2" charset="0"/>
+                          <a:ea typeface="Inter" panose="02000503000000020004" pitchFamily="2" charset="0"/>
+                        </a:rPr>
+                        <a:t> is  the foundation for Jupyter notebooks. </a:t>
+                      </a:r>
+                    </a:p>
+                    <a:p>
+                      <a:endParaRPr lang="en-US" b="1" dirty="0">
+                        <a:solidFill>
+                          <a:schemeClr val="tx1">
+                            <a:lumMod val="75000"/>
+                            <a:lumOff val="25000"/>
+                          </a:schemeClr>
+                        </a:solidFill>
+                        <a:latin typeface="Inter" panose="02000503000000020004" pitchFamily="2" charset="0"/>
+                        <a:ea typeface="Inter" panose="02000503000000020004" pitchFamily="2" charset="0"/>
+                      </a:endParaRPr>
                     </a:p>
                   </a:txBody>
                   <a:tcPr>
